--- a/Homework/DL_FactoryAutomation/산출물/발표용_FEMTO_RUL_20260624.pptx
+++ b/Homework/DL_FactoryAutomation/산출물/발표용_FEMTO_RUL_20260624.pptx
@@ -13,6 +13,19 @@
     <p:sldId id="261" r:id="rId12"/>
     <p:sldId id="262" r:id="rId13"/>
     <p:sldId id="263" r:id="rId14"/>
+    <p:sldId id="264" r:id="rId15"/>
+    <p:sldId id="265" r:id="rId16"/>
+    <p:sldId id="266" r:id="rId17"/>
+    <p:sldId id="267" r:id="rId18"/>
+    <p:sldId id="268" r:id="rId19"/>
+    <p:sldId id="269" r:id="rId20"/>
+    <p:sldId id="270" r:id="rId21"/>
+    <p:sldId id="271" r:id="rId22"/>
+    <p:sldId id="272" r:id="rId23"/>
+    <p:sldId id="273" r:id="rId24"/>
+    <p:sldId id="274" r:id="rId25"/>
+    <p:sldId id="275" r:id="rId26"/>
+    <p:sldId id="276" r:id="rId27"/>
   </p:sldIdLst>
   <p:sldSz cx="12188952" cy="6858000" type="screen4x3"/>
   <p:notesSz cx="6858000" cy="9144000"/>
@@ -3326,6 +3339,4279 @@
 </p:sld>
 </file>
 
+<file path=ppt/slides/slide10.xml><?xml version="1.0" encoding="utf-8"?>
+<p:sld xmlns:a="http://schemas.openxmlformats.org/drawingml/2006/main" xmlns:p="http://schemas.openxmlformats.org/presentationml/2006/main" xmlns:r="http://schemas.openxmlformats.org/officeDocument/2006/relationships">
+  <p:cSld>
+    <p:spTree>
+      <p:nvGrpSpPr>
+        <p:cNvPr id="1" name=""/>
+        <p:cNvGrpSpPr/>
+        <p:nvPr/>
+      </p:nvGrpSpPr>
+      <p:grpSpPr/>
+      <p:sp>
+        <p:nvSpPr>
+          <p:cNvPr id="2" name="TextBox 1"/>
+          <p:cNvSpPr txBox="1"/>
+          <p:nvPr/>
+        </p:nvSpPr>
+        <p:spPr>
+          <a:xfrm>
+            <a:off x="274320" y="91440"/>
+            <a:ext cx="8412480" cy="548640"/>
+          </a:xfrm>
+          <a:prstGeom prst="rect">
+            <a:avLst/>
+          </a:prstGeom>
+          <a:noFill/>
+        </p:spPr>
+        <p:txBody>
+          <a:bodyPr wrap="none">
+            <a:spAutoFit/>
+          </a:bodyPr>
+          <a:lstStyle/>
+          <a:p>
+            <a:r>
+              <a:rPr sz="2200" b="1"/>
+              <a:t>전처리 — Scale / Inverse Transform (FEMTO RUL)</a:t>
+            </a:r>
+          </a:p>
+        </p:txBody>
+      </p:sp>
+      <p:graphicFrame>
+        <p:nvGraphicFramePr>
+          <p:cNvPr id="3" name="Table 2"/>
+          <p:cNvGraphicFramePr>
+            <a:graphicFrameLocks noGrp="1"/>
+          </p:cNvGraphicFramePr>
+          <p:nvPr/>
+        </p:nvGraphicFramePr>
+        <p:xfrm>
+          <a:off x="274320" y="731520"/>
+          <a:ext cx="8412480" cy="2377440"/>
+        </p:xfrm>
+        <a:graphic>
+          <a:graphicData uri="http://schemas.openxmlformats.org/drawingml/2006/table">
+            <a:tbl>
+              <a:tblPr firstRow="1" bandRow="1">
+                <a:tableStyleId>{5C22544A-7EE6-4342-B048-85BDC9FD1C3A}</a:tableStyleId>
+              </a:tblPr>
+              <a:tblGrid>
+                <a:gridCol w="2804160"/>
+                <a:gridCol w="2804160"/>
+                <a:gridCol w="2804160"/>
+              </a:tblGrid>
+              <a:tr h="396240">
+                <a:tc>
+                  <a:txBody>
+                    <a:bodyPr/>
+                    <a:lstStyle/>
+                    <a:p>
+                      <a:r>
+                        <a:rPr b="1"/>
+                        <a:t>단계</a:t>
+                      </a:r>
+                    </a:p>
+                  </a:txBody>
+                  <a:tcPr/>
+                </a:tc>
+                <a:tc>
+                  <a:txBody>
+                    <a:bodyPr/>
+                    <a:lstStyle/>
+                    <a:p>
+                      <a:r>
+                        <a:rPr b="1"/>
+                        <a:t>대상</a:t>
+                      </a:r>
+                    </a:p>
+                  </a:txBody>
+                  <a:tcPr/>
+                </a:tc>
+                <a:tc>
+                  <a:txBody>
+                    <a:bodyPr/>
+                    <a:lstStyle/>
+                    <a:p>
+                      <a:r>
+                        <a:rPr b="1"/>
+                        <a:t>방법</a:t>
+                      </a:r>
+                    </a:p>
+                  </a:txBody>
+                  <a:tcPr/>
+                </a:tc>
+              </a:tr>
+              <a:tr h="396240">
+                <a:tc>
+                  <a:txBody>
+                    <a:bodyPr/>
+                    <a:lstStyle/>
+                    <a:p>
+                      <a:r>
+                        <a:t>Train X 스케일</a:t>
+                      </a:r>
+                    </a:p>
+                  </a:txBody>
+                  <a:tcPr/>
+                </a:tc>
+                <a:tc>
+                  <a:txBody>
+                    <a:bodyPr/>
+                    <a:lstStyle/>
+                    <a:p>
+                      <a:r>
+                        <a:t>X_tr</a:t>
+                      </a:r>
+                    </a:p>
+                  </a:txBody>
+                  <a:tcPr/>
+                </a:tc>
+                <a:tc>
+                  <a:txBody>
+                    <a:bodyPr/>
+                    <a:lstStyle/>
+                    <a:p>
+                      <a:r>
+                        <a:t>MinMaxScaler().fit_transform()</a:t>
+                      </a:r>
+                    </a:p>
+                  </a:txBody>
+                  <a:tcPr/>
+                </a:tc>
+              </a:tr>
+              <a:tr h="396240">
+                <a:tc>
+                  <a:txBody>
+                    <a:bodyPr/>
+                    <a:lstStyle/>
+                    <a:p>
+                      <a:r>
+                        <a:t>Test X 스케일</a:t>
+                      </a:r>
+                    </a:p>
+                  </a:txBody>
+                  <a:tcPr/>
+                </a:tc>
+                <a:tc>
+                  <a:txBody>
+                    <a:bodyPr/>
+                    <a:lstStyle/>
+                    <a:p>
+                      <a:r>
+                        <a:t>X_te</a:t>
+                      </a:r>
+                    </a:p>
+                  </a:txBody>
+                  <a:tcPr/>
+                </a:tc>
+                <a:tc>
+                  <a:txBody>
+                    <a:bodyPr/>
+                    <a:lstStyle/>
+                    <a:p>
+                      <a:r>
+                        <a:t>seq_scaler.transform() ← train fit</a:t>
+                      </a:r>
+                    </a:p>
+                  </a:txBody>
+                  <a:tcPr/>
+                </a:tc>
+              </a:tr>
+              <a:tr h="396240">
+                <a:tc>
+                  <a:txBody>
+                    <a:bodyPr/>
+                    <a:lstStyle/>
+                    <a:p>
+                      <a:r>
+                        <a:t>Train y 스케일</a:t>
+                      </a:r>
+                    </a:p>
+                  </a:txBody>
+                  <a:tcPr/>
+                </a:tc>
+                <a:tc>
+                  <a:txBody>
+                    <a:bodyPr/>
+                    <a:lstStyle/>
+                    <a:p>
+                      <a:r>
+                        <a:t>y_tr RUL</a:t>
+                      </a:r>
+                    </a:p>
+                  </a:txBody>
+                  <a:tcPr/>
+                </a:tc>
+                <a:tc>
+                  <a:txBody>
+                    <a:bodyPr/>
+                    <a:lstStyle/>
+                    <a:p>
+                      <a:r>
+                        <a:t>MinMaxScaler().fit_transform()</a:t>
+                      </a:r>
+                    </a:p>
+                  </a:txBody>
+                  <a:tcPr/>
+                </a:tc>
+              </a:tr>
+              <a:tr h="396240">
+                <a:tc>
+                  <a:txBody>
+                    <a:bodyPr/>
+                    <a:lstStyle/>
+                    <a:p>
+                      <a:r>
+                        <a:t>Test y 스케일</a:t>
+                      </a:r>
+                    </a:p>
+                  </a:txBody>
+                  <a:tcPr/>
+                </a:tc>
+                <a:tc>
+                  <a:txBody>
+                    <a:bodyPr/>
+                    <a:lstStyle/>
+                    <a:p>
+                      <a:r>
+                        <a:t>y_te RUL</a:t>
+                      </a:r>
+                    </a:p>
+                  </a:txBody>
+                  <a:tcPr/>
+                </a:tc>
+                <a:tc>
+                  <a:txBody>
+                    <a:bodyPr/>
+                    <a:lstStyle/>
+                    <a:p>
+                      <a:r>
+                        <a:t>y_scaler.transform() ← train fit</a:t>
+                      </a:r>
+                    </a:p>
+                  </a:txBody>
+                  <a:tcPr/>
+                </a:tc>
+              </a:tr>
+              <a:tr h="396240">
+                <a:tc>
+                  <a:txBody>
+                    <a:bodyPr/>
+                    <a:lstStyle/>
+                    <a:p>
+                      <a:r>
+                        <a:t>예측 역변환</a:t>
+                      </a:r>
+                    </a:p>
+                  </a:txBody>
+                  <a:tcPr/>
+                </a:tc>
+                <a:tc>
+                  <a:txBody>
+                    <a:bodyPr/>
+                    <a:lstStyle/>
+                    <a:p>
+                      <a:r>
+                        <a:t>y_pred [0,1]</a:t>
+                      </a:r>
+                    </a:p>
+                  </a:txBody>
+                  <a:tcPr/>
+                </a:tc>
+                <a:tc>
+                  <a:txBody>
+                    <a:bodyPr/>
+                    <a:lstStyle/>
+                    <a:p>
+                      <a:r>
+                        <a:t>y_scaler.inverse_transform() → 분 단위</a:t>
+                      </a:r>
+                    </a:p>
+                  </a:txBody>
+                  <a:tcPr/>
+                </a:tc>
+              </a:tr>
+            </a:tbl>
+          </a:graphicData>
+        </a:graphic>
+      </p:graphicFrame>
+      <p:sp>
+        <p:nvSpPr>
+          <p:cNvPr id="4" name="TextBox 3"/>
+          <p:cNvSpPr txBox="1"/>
+          <p:nvPr/>
+        </p:nvSpPr>
+        <p:spPr>
+          <a:xfrm>
+            <a:off x="274320" y="3291840"/>
+            <a:ext cx="8412480" cy="365760"/>
+          </a:xfrm>
+          <a:prstGeom prst="rect">
+            <a:avLst/>
+          </a:prstGeom>
+          <a:noFill/>
+        </p:spPr>
+        <p:txBody>
+          <a:bodyPr wrap="none">
+            <a:spAutoFit/>
+          </a:bodyPr>
+          <a:lstStyle/>
+          <a:p>
+            <a:r>
+              <a:rPr sz="1400" i="1"/>
+              <a:t>분류 모델(Source 2/3): sigmoid 출력 → 역변환 불필요</a:t>
+            </a:r>
+          </a:p>
+        </p:txBody>
+      </p:sp>
+    </p:spTree>
+  </p:cSld>
+  <p:clrMapOvr>
+    <a:masterClrMapping/>
+  </p:clrMapOvr>
+</p:sld>
+</file>
+
+<file path=ppt/slides/slide11.xml><?xml version="1.0" encoding="utf-8"?>
+<p:sld xmlns:a="http://schemas.openxmlformats.org/drawingml/2006/main" xmlns:p="http://schemas.openxmlformats.org/presentationml/2006/main" xmlns:r="http://schemas.openxmlformats.org/officeDocument/2006/relationships">
+  <p:cSld>
+    <p:spTree>
+      <p:nvGrpSpPr>
+        <p:cNvPr id="1" name=""/>
+        <p:cNvGrpSpPr/>
+        <p:nvPr/>
+      </p:nvGrpSpPr>
+      <p:grpSpPr/>
+      <p:sp>
+        <p:nvSpPr>
+          <p:cNvPr id="2" name="TextBox 1"/>
+          <p:cNvSpPr txBox="1"/>
+          <p:nvPr/>
+        </p:nvSpPr>
+        <p:spPr>
+          <a:xfrm>
+            <a:off x="274320" y="45720"/>
+            <a:ext cx="8412480" cy="457200"/>
+          </a:xfrm>
+          <a:prstGeom prst="rect">
+            <a:avLst/>
+          </a:prstGeom>
+          <a:noFill/>
+        </p:spPr>
+        <p:txBody>
+          <a:bodyPr wrap="none">
+            <a:spAutoFit/>
+          </a:bodyPr>
+          <a:lstStyle/>
+          <a:p>
+            <a:r>
+              <a:rPr sz="2000" b="1"/>
+              <a:t>RUL Actual vs Predicted — 역변환 후 분 단위</a:t>
+            </a:r>
+          </a:p>
+        </p:txBody>
+      </p:sp>
+      <p:pic>
+        <p:nvPicPr>
+          <p:cNvPr id="3" name="Picture 2" descr="D2_rul_compare.png"/>
+          <p:cNvPicPr>
+            <a:picLocks noChangeAspect="1"/>
+          </p:cNvPicPr>
+          <p:nvPr/>
+        </p:nvPicPr>
+        <p:blipFill>
+          <a:blip r:embed="rId2"/>
+          <a:stretch>
+            <a:fillRect/>
+          </a:stretch>
+        </p:blipFill>
+        <p:spPr>
+          <a:xfrm>
+            <a:off x="457200" y="594360"/>
+            <a:ext cx="8229600" cy="4572000"/>
+          </a:xfrm>
+          <a:prstGeom prst="rect">
+            <a:avLst/>
+          </a:prstGeom>
+        </p:spPr>
+      </p:pic>
+    </p:spTree>
+  </p:cSld>
+  <p:clrMapOvr>
+    <a:masterClrMapping/>
+  </p:clrMapOvr>
+</p:sld>
+</file>
+
+<file path=ppt/slides/slide12.xml><?xml version="1.0" encoding="utf-8"?>
+<p:sld xmlns:a="http://schemas.openxmlformats.org/drawingml/2006/main" xmlns:p="http://schemas.openxmlformats.org/presentationml/2006/main" xmlns:r="http://schemas.openxmlformats.org/officeDocument/2006/relationships">
+  <p:cSld>
+    <p:spTree>
+      <p:nvGrpSpPr>
+        <p:cNvPr id="1" name=""/>
+        <p:cNvGrpSpPr/>
+        <p:nvPr/>
+      </p:nvGrpSpPr>
+      <p:grpSpPr/>
+      <p:sp>
+        <p:nvSpPr>
+          <p:cNvPr id="2" name="TextBox 1"/>
+          <p:cNvSpPr txBox="1"/>
+          <p:nvPr/>
+        </p:nvSpPr>
+        <p:spPr>
+          <a:xfrm>
+            <a:off x="274320" y="45720"/>
+            <a:ext cx="8412480" cy="457200"/>
+          </a:xfrm>
+          <a:prstGeom prst="rect">
+            <a:avLst/>
+          </a:prstGeom>
+          <a:noFill/>
+        </p:spPr>
+        <p:txBody>
+          <a:bodyPr wrap="none">
+            <a:spAutoFit/>
+          </a:bodyPr>
+          <a:lstStyle/>
+          <a:p>
+            <a:r>
+              <a:rPr sz="2000" b="1"/>
+              <a:t>LSTM 학습 곡선 (Loss / MAE per epoch)</a:t>
+            </a:r>
+          </a:p>
+        </p:txBody>
+      </p:sp>
+      <p:pic>
+        <p:nvPicPr>
+          <p:cNvPr id="3" name="Picture 2" descr="09_lstm.png"/>
+          <p:cNvPicPr>
+            <a:picLocks noChangeAspect="1"/>
+          </p:cNvPicPr>
+          <p:nvPr/>
+        </p:nvPicPr>
+        <p:blipFill>
+          <a:blip r:embed="rId2"/>
+          <a:stretch>
+            <a:fillRect/>
+          </a:stretch>
+        </p:blipFill>
+        <p:spPr>
+          <a:xfrm>
+            <a:off x="457200" y="594360"/>
+            <a:ext cx="8229600" cy="4572000"/>
+          </a:xfrm>
+          <a:prstGeom prst="rect">
+            <a:avLst/>
+          </a:prstGeom>
+        </p:spPr>
+      </p:pic>
+    </p:spTree>
+  </p:cSld>
+  <p:clrMapOvr>
+    <a:masterClrMapping/>
+  </p:clrMapOvr>
+</p:sld>
+</file>
+
+<file path=ppt/slides/slide13.xml><?xml version="1.0" encoding="utf-8"?>
+<p:sld xmlns:a="http://schemas.openxmlformats.org/drawingml/2006/main" xmlns:p="http://schemas.openxmlformats.org/presentationml/2006/main" xmlns:r="http://schemas.openxmlformats.org/officeDocument/2006/relationships">
+  <p:cSld>
+    <p:spTree>
+      <p:nvGrpSpPr>
+        <p:cNvPr id="1" name=""/>
+        <p:cNvGrpSpPr/>
+        <p:nvPr/>
+      </p:nvGrpSpPr>
+      <p:grpSpPr/>
+      <p:sp>
+        <p:nvSpPr>
+          <p:cNvPr id="2" name="TextBox 1"/>
+          <p:cNvSpPr txBox="1"/>
+          <p:nvPr/>
+        </p:nvSpPr>
+        <p:spPr>
+          <a:xfrm>
+            <a:off x="274320" y="45720"/>
+            <a:ext cx="8412480" cy="457200"/>
+          </a:xfrm>
+          <a:prstGeom prst="rect">
+            <a:avLst/>
+          </a:prstGeom>
+          <a:noFill/>
+        </p:spPr>
+        <p:txBody>
+          <a:bodyPr wrap="none">
+            <a:spAutoFit/>
+          </a:bodyPr>
+          <a:lstStyle/>
+          <a:p>
+            <a:r>
+              <a:rPr sz="2000" b="1"/>
+              <a:t>시계열 예측 — 슬라이딩 윈도우 입력 텐서 구조</a:t>
+            </a:r>
+          </a:p>
+        </p:txBody>
+      </p:sp>
+      <p:sp>
+        <p:nvSpPr>
+          <p:cNvPr id="3" name="TextBox 2"/>
+          <p:cNvSpPr txBox="1"/>
+          <p:nvPr/>
+        </p:nvSpPr>
+        <p:spPr>
+          <a:xfrm>
+            <a:off x="274320" y="502920"/>
+            <a:ext cx="8412480" cy="365760"/>
+          </a:xfrm>
+          <a:prstGeom prst="rect">
+            <a:avLst/>
+          </a:prstGeom>
+          <a:noFill/>
+        </p:spPr>
+        <p:txBody>
+          <a:bodyPr wrap="none">
+            <a:spAutoFit/>
+          </a:bodyPr>
+          <a:lstStyle/>
+          <a:p>
+            <a:r>
+              <a:rPr sz="1100"/>
+              <a:t>DL 모델은 센서 데이터를 슬라이딩 윈도우로 분할하여 3D 텐서 (배치 크기 × 타임스텝 수 × 특징 수) 형태로 입력받습니다.</a:t>
+            </a:r>
+          </a:p>
+        </p:txBody>
+      </p:sp>
+      <p:graphicFrame>
+        <p:nvGraphicFramePr>
+          <p:cNvPr id="4" name="Table 3"/>
+          <p:cNvGraphicFramePr>
+            <a:graphicFrameLocks noGrp="1"/>
+          </p:cNvGraphicFramePr>
+          <p:nvPr/>
+        </p:nvGraphicFramePr>
+        <p:xfrm>
+          <a:off x="182880" y="914400"/>
+          <a:ext cx="8595360" cy="3108960"/>
+        </p:xfrm>
+        <a:graphic>
+          <a:graphicData uri="http://schemas.openxmlformats.org/drawingml/2006/table">
+            <a:tbl>
+              <a:tblPr firstRow="1" bandRow="1">
+                <a:tableStyleId>{5C22544A-7EE6-4342-B048-85BDC9FD1C3A}</a:tableStyleId>
+              </a:tblPr>
+              <a:tblGrid>
+                <a:gridCol w="2865120"/>
+                <a:gridCol w="2865120"/>
+                <a:gridCol w="2865120"/>
+              </a:tblGrid>
+              <a:tr h="621792">
+                <a:tc>
+                  <a:txBody>
+                    <a:bodyPr/>
+                    <a:lstStyle/>
+                    <a:p>
+                      <a:r>
+                        <a:rPr sz="1000" b="1">
+                          <a:solidFill>
+                            <a:srgbClr val="FFFFFF"/>
+                          </a:solidFill>
+                        </a:rPr>
+                        <a:t>항목</a:t>
+                      </a:r>
+                    </a:p>
+                  </a:txBody>
+                  <a:tcPr/>
+                </a:tc>
+                <a:tc>
+                  <a:txBody>
+                    <a:bodyPr/>
+                    <a:lstStyle/>
+                    <a:p>
+                      <a:r>
+                        <a:rPr sz="1000" b="1">
+                          <a:solidFill>
+                            <a:srgbClr val="FFFFFF"/>
+                          </a:solidFill>
+                        </a:rPr>
+                        <a:t>Source 1 FEMTO (RUL 회귀)</a:t>
+                      </a:r>
+                    </a:p>
+                  </a:txBody>
+                  <a:tcPr/>
+                </a:tc>
+                <a:tc>
+                  <a:txBody>
+                    <a:bodyPr/>
+                    <a:lstStyle/>
+                    <a:p>
+                      <a:r>
+                        <a:rPr sz="1000" b="1">
+                          <a:solidFill>
+                            <a:srgbClr val="FFFFFF"/>
+                          </a:solidFill>
+                        </a:rPr>
+                        <a:t>Source 3 Milling (마모 분류)</a:t>
+                      </a:r>
+                    </a:p>
+                  </a:txBody>
+                  <a:tcPr/>
+                </a:tc>
+              </a:tr>
+              <a:tr h="621792">
+                <a:tc>
+                  <a:txBody>
+                    <a:bodyPr/>
+                    <a:lstStyle/>
+                    <a:p>
+                      <a:r>
+                        <a:rPr sz="1000"/>
+                        <a:t>배치 크기</a:t>
+                      </a:r>
+                    </a:p>
+                    <a:p>
+                      <a:r>
+                        <a:t>(한 번에 처리하는 시퀀스 수)</a:t>
+                      </a:r>
+                    </a:p>
+                  </a:txBody>
+                  <a:tcPr/>
+                </a:tc>
+                <a:tc>
+                  <a:txBody>
+                    <a:bodyPr/>
+                    <a:lstStyle/>
+                    <a:p>
+                      <a:r>
+                        <a:rPr sz="1000"/>
+                        <a:t>32</a:t>
+                      </a:r>
+                    </a:p>
+                  </a:txBody>
+                  <a:tcPr/>
+                </a:tc>
+                <a:tc>
+                  <a:txBody>
+                    <a:bodyPr/>
+                    <a:lstStyle/>
+                    <a:p>
+                      <a:r>
+                        <a:rPr sz="1000"/>
+                        <a:t>64</a:t>
+                      </a:r>
+                    </a:p>
+                  </a:txBody>
+                  <a:tcPr/>
+                </a:tc>
+              </a:tr>
+              <a:tr h="621792">
+                <a:tc>
+                  <a:txBody>
+                    <a:bodyPr/>
+                    <a:lstStyle/>
+                    <a:p>
+                      <a:r>
+                        <a:rPr sz="1000"/>
+                        <a:t>타임스텝 수</a:t>
+                      </a:r>
+                    </a:p>
+                    <a:p>
+                      <a:r>
+                        <a:t>(시퀀스 내 시점 개수)</a:t>
+                      </a:r>
+                    </a:p>
+                  </a:txBody>
+                  <a:tcPr/>
+                </a:tc>
+                <a:tc>
+                  <a:txBody>
+                    <a:bodyPr/>
+                    <a:lstStyle/>
+                    <a:p>
+                      <a:r>
+                        <a:rPr sz="1000"/>
+                        <a:t>30</a:t>
+                      </a:r>
+                    </a:p>
+                    <a:p>
+                      <a:r>
+                        <a:t>(30분 연속 스냅샷, 1스냅샷=1분)</a:t>
+                      </a:r>
+                    </a:p>
+                  </a:txBody>
+                  <a:tcPr/>
+                </a:tc>
+                <a:tc>
+                  <a:txBody>
+                    <a:bodyPr/>
+                    <a:lstStyle/>
+                    <a:p>
+                      <a:r>
+                        <a:rPr sz="1000"/>
+                        <a:t>512</a:t>
+                      </a:r>
+                    </a:p>
+                    <a:p>
+                      <a:r>
+                        <a:t>(~51ms, 10kHz 기준)</a:t>
+                      </a:r>
+                    </a:p>
+                  </a:txBody>
+                  <a:tcPr/>
+                </a:tc>
+              </a:tr>
+              <a:tr h="621792">
+                <a:tc>
+                  <a:txBody>
+                    <a:bodyPr/>
+                    <a:lstStyle/>
+                    <a:p>
+                      <a:r>
+                        <a:rPr sz="1000"/>
+                        <a:t>특징 수</a:t>
+                      </a:r>
+                    </a:p>
+                    <a:p>
+                      <a:r>
+                        <a:t>(매 시점의 변수 수)</a:t>
+                      </a:r>
+                    </a:p>
+                  </a:txBody>
+                  <a:tcPr/>
+                </a:tc>
+                <a:tc>
+                  <a:txBody>
+                    <a:bodyPr/>
+                    <a:lstStyle/>
+                    <a:p>
+                      <a:r>
+                        <a:rPr sz="1000"/>
+                        <a:t>9</a:t>
+                      </a:r>
+                    </a:p>
+                    <a:p>
+                      <a:r>
+                        <a:t>h_rms, h_kurt, h_skew, h_crest</a:t>
+                      </a:r>
+                    </a:p>
+                    <a:p>
+                      <a:r>
+                        <a:t>v_rms, v_kurt, v_skew, v_crest, temp_mean</a:t>
+                      </a:r>
+                    </a:p>
+                  </a:txBody>
+                  <a:tcPr/>
+                </a:tc>
+                <a:tc>
+                  <a:txBody>
+                    <a:bodyPr/>
+                    <a:lstStyle/>
+                    <a:p>
+                      <a:r>
+                        <a:rPr sz="1000"/>
+                        <a:t>6</a:t>
+                      </a:r>
+                    </a:p>
+                    <a:p>
+                      <a:r>
+                        <a:t>smcAC, smcDC, vib_table</a:t>
+                      </a:r>
+                    </a:p>
+                    <a:p>
+                      <a:r>
+                        <a:t>vib_spindle, AE_table, AE_spindle</a:t>
+                      </a:r>
+                    </a:p>
+                  </a:txBody>
+                  <a:tcPr/>
+                </a:tc>
+              </a:tr>
+              <a:tr h="621792">
+                <a:tc>
+                  <a:txBody>
+                    <a:bodyPr/>
+                    <a:lstStyle/>
+                    <a:p>
+                      <a:r>
+                        <a:rPr sz="1000"/>
+                        <a:t>입력 텐서 shape</a:t>
+                      </a:r>
+                    </a:p>
+                  </a:txBody>
+                  <a:tcPr/>
+                </a:tc>
+                <a:tc>
+                  <a:txBody>
+                    <a:bodyPr/>
+                    <a:lstStyle/>
+                    <a:p>
+                      <a:r>
+                        <a:rPr sz="1000"/>
+                        <a:t>(32, 30, 9)</a:t>
+                      </a:r>
+                    </a:p>
+                  </a:txBody>
+                  <a:tcPr/>
+                </a:tc>
+                <a:tc>
+                  <a:txBody>
+                    <a:bodyPr/>
+                    <a:lstStyle/>
+                    <a:p>
+                      <a:r>
+                        <a:rPr sz="1000"/>
+                        <a:t>(64, 512, 6)</a:t>
+                      </a:r>
+                    </a:p>
+                  </a:txBody>
+                  <a:tcPr/>
+                </a:tc>
+              </a:tr>
+            </a:tbl>
+          </a:graphicData>
+        </a:graphic>
+      </p:graphicFrame>
+      <p:sp>
+        <p:nvSpPr>
+          <p:cNvPr id="5" name="TextBox 4"/>
+          <p:cNvSpPr txBox="1"/>
+          <p:nvPr/>
+        </p:nvSpPr>
+        <p:spPr>
+          <a:xfrm>
+            <a:off x="274320" y="4114800"/>
+            <a:ext cx="8595360" cy="320040"/>
+          </a:xfrm>
+          <a:prstGeom prst="rect">
+            <a:avLst/>
+          </a:prstGeom>
+          <a:noFill/>
+        </p:spPr>
+        <p:txBody>
+          <a:bodyPr wrap="none">
+            <a:spAutoFit/>
+          </a:bodyPr>
+          <a:lstStyle/>
+          <a:p>
+            <a:r>
+              <a:rPr sz="900" i="1"/>
+              <a:t>※ 타임스텝=과거를 얼마나 참조할지 / 특징=매 시점에서 읽는 센서 채널 수</a:t>
+            </a:r>
+          </a:p>
+        </p:txBody>
+      </p:sp>
+    </p:spTree>
+  </p:cSld>
+  <p:clrMapOvr>
+    <a:masterClrMapping/>
+  </p:clrMapOvr>
+</p:sld>
+</file>
+
+<file path=ppt/slides/slide14.xml><?xml version="1.0" encoding="utf-8"?>
+<p:sld xmlns:a="http://schemas.openxmlformats.org/drawingml/2006/main" xmlns:p="http://schemas.openxmlformats.org/presentationml/2006/main" xmlns:r="http://schemas.openxmlformats.org/officeDocument/2006/relationships">
+  <p:cSld>
+    <p:spTree>
+      <p:nvGrpSpPr>
+        <p:cNvPr id="1" name=""/>
+        <p:cNvGrpSpPr/>
+        <p:nvPr/>
+      </p:nvGrpSpPr>
+      <p:grpSpPr/>
+      <p:sp>
+        <p:nvSpPr>
+          <p:cNvPr id="2" name="TextBox 1"/>
+          <p:cNvSpPr txBox="1"/>
+          <p:nvPr/>
+        </p:nvSpPr>
+        <p:spPr>
+          <a:xfrm>
+            <a:off x="182880" y="27432"/>
+            <a:ext cx="8595360" cy="438912"/>
+          </a:xfrm>
+          <a:prstGeom prst="rect">
+            <a:avLst/>
+          </a:prstGeom>
+          <a:noFill/>
+        </p:spPr>
+        <p:txBody>
+          <a:bodyPr wrap="none">
+            <a:spAutoFit/>
+          </a:bodyPr>
+          <a:lstStyle/>
+          <a:p>
+            <a:r>
+              <a:rPr sz="2000" b="1"/>
+              <a:t>학습 모델 및 하이퍼파라미터 상세</a:t>
+            </a:r>
+          </a:p>
+        </p:txBody>
+      </p:sp>
+      <p:graphicFrame>
+        <p:nvGraphicFramePr>
+          <p:cNvPr id="3" name="Table 2"/>
+          <p:cNvGraphicFramePr>
+            <a:graphicFrameLocks noGrp="1"/>
+          </p:cNvGraphicFramePr>
+          <p:nvPr/>
+        </p:nvGraphicFramePr>
+        <p:xfrm>
+          <a:off x="91440" y="502920"/>
+          <a:ext cx="8869680" cy="4160520"/>
+        </p:xfrm>
+        <a:graphic>
+          <a:graphicData uri="http://schemas.openxmlformats.org/drawingml/2006/table">
+            <a:tbl>
+              <a:tblPr firstRow="1" bandRow="1">
+                <a:tableStyleId>{5C22544A-7EE6-4342-B048-85BDC9FD1C3A}</a:tableStyleId>
+              </a:tblPr>
+              <a:tblGrid>
+                <a:gridCol w="2956560"/>
+                <a:gridCol w="2956560"/>
+                <a:gridCol w="2956560"/>
+              </a:tblGrid>
+              <a:tr h="346710">
+                <a:tc>
+                  <a:txBody>
+                    <a:bodyPr/>
+                    <a:lstStyle/>
+                    <a:p>
+                      <a:r>
+                        <a:rPr sz="900" b="1">
+                          <a:solidFill>
+                            <a:srgbClr val="FFFFFF"/>
+                          </a:solidFill>
+                        </a:rPr>
+                        <a:t>하이퍼파라미터</a:t>
+                      </a:r>
+                    </a:p>
+                  </a:txBody>
+                  <a:tcPr/>
+                </a:tc>
+                <a:tc>
+                  <a:txBody>
+                    <a:bodyPr/>
+                    <a:lstStyle/>
+                    <a:p>
+                      <a:r>
+                        <a:rPr sz="900" b="1">
+                          <a:solidFill>
+                            <a:srgbClr val="FFFFFF"/>
+                          </a:solidFill>
+                        </a:rPr>
+                        <a:t>Source 1 FEMTO (GRU — RUL 회귀)</a:t>
+                      </a:r>
+                    </a:p>
+                  </a:txBody>
+                  <a:tcPr/>
+                </a:tc>
+                <a:tc>
+                  <a:txBody>
+                    <a:bodyPr/>
+                    <a:lstStyle/>
+                    <a:p>
+                      <a:r>
+                        <a:rPr sz="900" b="1">
+                          <a:solidFill>
+                            <a:srgbClr val="FFFFFF"/>
+                          </a:solidFill>
+                        </a:rPr>
+                        <a:t>Source 3 Milling (1D-CNN — 마모 분류)</a:t>
+                      </a:r>
+                    </a:p>
+                  </a:txBody>
+                  <a:tcPr/>
+                </a:tc>
+              </a:tr>
+              <a:tr h="346710">
+                <a:tc>
+                  <a:txBody>
+                    <a:bodyPr/>
+                    <a:lstStyle/>
+                    <a:p>
+                      <a:r>
+                        <a:rPr sz="900"/>
+                        <a:t>사용 모델</a:t>
+                      </a:r>
+                    </a:p>
+                  </a:txBody>
+                  <a:tcPr/>
+                </a:tc>
+                <a:tc>
+                  <a:txBody>
+                    <a:bodyPr/>
+                    <a:lstStyle/>
+                    <a:p>
+                      <a:r>
+                        <a:rPr sz="900"/>
+                        <a:t>GRU</a:t>
+                      </a:r>
+                    </a:p>
+                    <a:p>
+                      <a:r>
+                        <a:t>(LSTM/GRU/BiLSTM/1D-CNN/CNN-LSTM 5종 비교</a:t>
+                      </a:r>
+                    </a:p>
+                    <a:p>
+                      <a:r>
+                        <a:t>-&gt; OOS RMSE 최소 모델 자동 선정)</a:t>
+                      </a:r>
+                    </a:p>
+                  </a:txBody>
+                  <a:tcPr/>
+                </a:tc>
+                <a:tc>
+                  <a:txBody>
+                    <a:bodyPr/>
+                    <a:lstStyle/>
+                    <a:p>
+                      <a:r>
+                        <a:rPr sz="900"/>
+                        <a:t>멀티채널 1D-CNN</a:t>
+                      </a:r>
+                    </a:p>
+                    <a:p>
+                      <a:r>
+                        <a:t>(Conv1D 64-&gt;128-&gt;256, BatchNorm, GAP)</a:t>
+                      </a:r>
+                    </a:p>
+                  </a:txBody>
+                  <a:tcPr/>
+                </a:tc>
+              </a:tr>
+              <a:tr h="346710">
+                <a:tc>
+                  <a:txBody>
+                    <a:bodyPr/>
+                    <a:lstStyle/>
+                    <a:p>
+                      <a:r>
+                        <a:rPr sz="900"/>
+                        <a:t>배치 크기</a:t>
+                      </a:r>
+                    </a:p>
+                  </a:txBody>
+                  <a:tcPr/>
+                </a:tc>
+                <a:tc>
+                  <a:txBody>
+                    <a:bodyPr/>
+                    <a:lstStyle/>
+                    <a:p>
+                      <a:r>
+                        <a:rPr sz="900"/>
+                        <a:t>32</a:t>
+                      </a:r>
+                    </a:p>
+                  </a:txBody>
+                  <a:tcPr/>
+                </a:tc>
+                <a:tc>
+                  <a:txBody>
+                    <a:bodyPr/>
+                    <a:lstStyle/>
+                    <a:p>
+                      <a:r>
+                        <a:rPr sz="900"/>
+                        <a:t>64</a:t>
+                      </a:r>
+                    </a:p>
+                  </a:txBody>
+                  <a:tcPr/>
+                </a:tc>
+              </a:tr>
+              <a:tr h="346710">
+                <a:tc>
+                  <a:txBody>
+                    <a:bodyPr/>
+                    <a:lstStyle/>
+                    <a:p>
+                      <a:r>
+                        <a:rPr sz="900"/>
+                        <a:t>타임스텝 수 (Window Size)</a:t>
+                      </a:r>
+                    </a:p>
+                  </a:txBody>
+                  <a:tcPr/>
+                </a:tc>
+                <a:tc>
+                  <a:txBody>
+                    <a:bodyPr/>
+                    <a:lstStyle/>
+                    <a:p>
+                      <a:r>
+                        <a:rPr sz="900"/>
+                        <a:t>30</a:t>
+                      </a:r>
+                    </a:p>
+                    <a:p>
+                      <a:r>
+                        <a:t>(그리드서치 탐색 범위: 20 / 30 / 50)</a:t>
+                      </a:r>
+                    </a:p>
+                  </a:txBody>
+                  <a:tcPr/>
+                </a:tc>
+                <a:tc>
+                  <a:txBody>
+                    <a:bodyPr/>
+                    <a:lstStyle/>
+                    <a:p>
+                      <a:r>
+                        <a:rPr sz="900"/>
+                        <a:t>512</a:t>
+                      </a:r>
+                    </a:p>
+                    <a:p>
+                      <a:r>
+                        <a:t>(고정: 10kHz 원시신호 ~51ms)</a:t>
+                      </a:r>
+                    </a:p>
+                  </a:txBody>
+                  <a:tcPr/>
+                </a:tc>
+              </a:tr>
+              <a:tr h="346710">
+                <a:tc>
+                  <a:txBody>
+                    <a:bodyPr/>
+                    <a:lstStyle/>
+                    <a:p>
+                      <a:r>
+                        <a:rPr sz="900"/>
+                        <a:t>은닉 유닛 수 (Units)</a:t>
+                      </a:r>
+                    </a:p>
+                  </a:txBody>
+                  <a:tcPr/>
+                </a:tc>
+                <a:tc>
+                  <a:txBody>
+                    <a:bodyPr/>
+                    <a:lstStyle/>
+                    <a:p>
+                      <a:r>
+                        <a:rPr sz="900"/>
+                        <a:t>64</a:t>
+                      </a:r>
+                    </a:p>
+                    <a:p>
+                      <a:r>
+                        <a:t>(그리드서치 탐색 범위: 32 / 64 / 128)</a:t>
+                      </a:r>
+                    </a:p>
+                  </a:txBody>
+                  <a:tcPr/>
+                </a:tc>
+                <a:tc>
+                  <a:txBody>
+                    <a:bodyPr/>
+                    <a:lstStyle/>
+                    <a:p>
+                      <a:r>
+                        <a:rPr sz="900"/>
+                        <a:t>64-&gt;128-&gt;256</a:t>
+                      </a:r>
+                    </a:p>
+                    <a:p>
+                      <a:r>
+                        <a:t>(레이어별 증가형)</a:t>
+                      </a:r>
+                    </a:p>
+                  </a:txBody>
+                  <a:tcPr/>
+                </a:tc>
+              </a:tr>
+              <a:tr h="346710">
+                <a:tc>
+                  <a:txBody>
+                    <a:bodyPr/>
+                    <a:lstStyle/>
+                    <a:p>
+                      <a:r>
+                        <a:rPr sz="900"/>
+                        <a:t>드롭아웃</a:t>
+                      </a:r>
+                    </a:p>
+                  </a:txBody>
+                  <a:tcPr/>
+                </a:tc>
+                <a:tc>
+                  <a:txBody>
+                    <a:bodyPr/>
+                    <a:lstStyle/>
+                    <a:p>
+                      <a:r>
+                        <a:rPr sz="900"/>
+                        <a:t>0.2</a:t>
+                      </a:r>
+                    </a:p>
+                    <a:p>
+                      <a:r>
+                        <a:t>(탐색 범위: 0.1 / 0.2 / 0.3)</a:t>
+                      </a:r>
+                    </a:p>
+                  </a:txBody>
+                  <a:tcPr/>
+                </a:tc>
+                <a:tc>
+                  <a:txBody>
+                    <a:bodyPr/>
+                    <a:lstStyle/>
+                    <a:p>
+                      <a:r>
+                        <a:rPr sz="900"/>
+                        <a:t>0.3 고정</a:t>
+                      </a:r>
+                    </a:p>
+                  </a:txBody>
+                  <a:tcPr/>
+                </a:tc>
+              </a:tr>
+              <a:tr h="346710">
+                <a:tc>
+                  <a:txBody>
+                    <a:bodyPr/>
+                    <a:lstStyle/>
+                    <a:p>
+                      <a:r>
+                        <a:rPr sz="900"/>
+                        <a:t>옵티마이저</a:t>
+                      </a:r>
+                    </a:p>
+                  </a:txBody>
+                  <a:tcPr/>
+                </a:tc>
+                <a:tc>
+                  <a:txBody>
+                    <a:bodyPr/>
+                    <a:lstStyle/>
+                    <a:p>
+                      <a:r>
+                        <a:rPr sz="900"/>
+                        <a:t>Adam (lr=1e-3)</a:t>
+                      </a:r>
+                    </a:p>
+                  </a:txBody>
+                  <a:tcPr/>
+                </a:tc>
+                <a:tc>
+                  <a:txBody>
+                    <a:bodyPr/>
+                    <a:lstStyle/>
+                    <a:p>
+                      <a:r>
+                        <a:rPr sz="900"/>
+                        <a:t>Adam (lr=1e-3)</a:t>
+                      </a:r>
+                    </a:p>
+                  </a:txBody>
+                  <a:tcPr/>
+                </a:tc>
+              </a:tr>
+              <a:tr h="346710">
+                <a:tc>
+                  <a:txBody>
+                    <a:bodyPr/>
+                    <a:lstStyle/>
+                    <a:p>
+                      <a:r>
+                        <a:rPr sz="900"/>
+                        <a:t>손실 함수</a:t>
+                      </a:r>
+                    </a:p>
+                  </a:txBody>
+                  <a:tcPr/>
+                </a:tc>
+                <a:tc>
+                  <a:txBody>
+                    <a:bodyPr/>
+                    <a:lstStyle/>
+                    <a:p>
+                      <a:r>
+                        <a:rPr sz="900"/>
+                        <a:t>MSE (회귀)</a:t>
+                      </a:r>
+                    </a:p>
+                  </a:txBody>
+                  <a:tcPr/>
+                </a:tc>
+                <a:tc>
+                  <a:txBody>
+                    <a:bodyPr/>
+                    <a:lstStyle/>
+                    <a:p>
+                      <a:r>
+                        <a:rPr sz="900"/>
+                        <a:t>Binary Cross-Entropy (이진 분류)</a:t>
+                      </a:r>
+                    </a:p>
+                  </a:txBody>
+                  <a:tcPr/>
+                </a:tc>
+              </a:tr>
+              <a:tr h="346710">
+                <a:tc>
+                  <a:txBody>
+                    <a:bodyPr/>
+                    <a:lstStyle/>
+                    <a:p>
+                      <a:r>
+                        <a:rPr sz="900"/>
+                        <a:t>최대 에폭</a:t>
+                      </a:r>
+                    </a:p>
+                  </a:txBody>
+                  <a:tcPr/>
+                </a:tc>
+                <a:tc>
+                  <a:txBody>
+                    <a:bodyPr/>
+                    <a:lstStyle/>
+                    <a:p>
+                      <a:r>
+                        <a:rPr sz="900"/>
+                        <a:t>50 (EarlyStopping patience=7)</a:t>
+                      </a:r>
+                    </a:p>
+                  </a:txBody>
+                  <a:tcPr/>
+                </a:tc>
+                <a:tc>
+                  <a:txBody>
+                    <a:bodyPr/>
+                    <a:lstStyle/>
+                    <a:p>
+                      <a:r>
+                        <a:rPr sz="900"/>
+                        <a:t>50 (EarlyStopping patience=8</a:t>
+                      </a:r>
+                    </a:p>
+                    <a:p>
+                      <a:r>
+                        <a:t>+ ReduceLROnPlateau)</a:t>
+                      </a:r>
+                    </a:p>
+                  </a:txBody>
+                  <a:tcPr/>
+                </a:tc>
+              </a:tr>
+              <a:tr h="346710">
+                <a:tc>
+                  <a:txBody>
+                    <a:bodyPr/>
+                    <a:lstStyle/>
+                    <a:p>
+                      <a:r>
+                        <a:rPr sz="900"/>
+                        <a:t>교차검증</a:t>
+                      </a:r>
+                    </a:p>
+                  </a:txBody>
+                  <a:tcPr/>
+                </a:tc>
+                <a:tc>
+                  <a:txBody>
+                    <a:bodyPr/>
+                    <a:lstStyle/>
+                    <a:p>
+                      <a:r>
+                        <a:rPr sz="900"/>
+                        <a:t>GroupKFold (n_splits=3)</a:t>
+                      </a:r>
+                    </a:p>
+                    <a:p>
+                      <a:r>
+                        <a:t>베어링 단위 분리 — 시간 누수 차단</a:t>
+                      </a:r>
+                    </a:p>
+                  </a:txBody>
+                  <a:tcPr/>
+                </a:tc>
+                <a:tc>
+                  <a:txBody>
+                    <a:bodyPr/>
+                    <a:lstStyle/>
+                    <a:p>
+                      <a:r>
+                        <a:rPr sz="900"/>
+                        <a:t>Stratified holdout (val=15%)</a:t>
+                      </a:r>
+                    </a:p>
+                  </a:txBody>
+                  <a:tcPr/>
+                </a:tc>
+              </a:tr>
+              <a:tr h="346710">
+                <a:tc>
+                  <a:txBody>
+                    <a:bodyPr/>
+                    <a:lstStyle/>
+                    <a:p>
+                      <a:r>
+                        <a:rPr sz="900"/>
+                        <a:t>불균형 처리</a:t>
+                      </a:r>
+                    </a:p>
+                  </a:txBody>
+                  <a:tcPr/>
+                </a:tc>
+                <a:tc>
+                  <a:txBody>
+                    <a:bodyPr/>
+                    <a:lstStyle/>
+                    <a:p>
+                      <a:r>
+                        <a:rPr sz="900"/>
+                        <a:t>없음 (연속값 회귀)</a:t>
+                      </a:r>
+                    </a:p>
+                  </a:txBody>
+                  <a:tcPr/>
+                </a:tc>
+                <a:tc>
+                  <a:txBody>
+                    <a:bodyPr/>
+                    <a:lstStyle/>
+                    <a:p>
+                      <a:r>
+                        <a:rPr sz="900"/>
+                        <a:t>class_weight 역가중치</a:t>
+                      </a:r>
+                    </a:p>
+                    <a:p>
+                      <a:r>
+                        <a:t>(마모 클래스 강조)</a:t>
+                      </a:r>
+                    </a:p>
+                  </a:txBody>
+                  <a:tcPr/>
+                </a:tc>
+              </a:tr>
+              <a:tr h="346710">
+                <a:tc>
+                  <a:txBody>
+                    <a:bodyPr/>
+                    <a:lstStyle/>
+                    <a:p>
+                      <a:r>
+                        <a:rPr sz="900"/>
+                        <a:t>스케일링</a:t>
+                      </a:r>
+                    </a:p>
+                  </a:txBody>
+                  <a:tcPr/>
+                </a:tc>
+                <a:tc>
+                  <a:txBody>
+                    <a:bodyPr/>
+                    <a:lstStyle/>
+                    <a:p>
+                      <a:r>
+                        <a:rPr sz="900"/>
+                        <a:t>MinMaxScaler</a:t>
+                      </a:r>
+                    </a:p>
+                    <a:p>
+                      <a:r>
+                        <a:t>(피처+타깃 모두 [0,1])</a:t>
+                      </a:r>
+                    </a:p>
+                  </a:txBody>
+                  <a:tcPr/>
+                </a:tc>
+                <a:tc>
+                  <a:txBody>
+                    <a:bodyPr/>
+                    <a:lstStyle/>
+                    <a:p>
+                      <a:r>
+                        <a:rPr sz="900"/>
+                        <a:t>채널별 표준화</a:t>
+                      </a:r>
+                    </a:p>
+                    <a:p>
+                      <a:r>
+                        <a:t>(Train mean/std 기준)</a:t>
+                      </a:r>
+                    </a:p>
+                  </a:txBody>
+                  <a:tcPr/>
+                </a:tc>
+              </a:tr>
+            </a:tbl>
+          </a:graphicData>
+        </a:graphic>
+      </p:graphicFrame>
+    </p:spTree>
+  </p:cSld>
+  <p:clrMapOvr>
+    <a:masterClrMapping/>
+  </p:clrMapOvr>
+</p:sld>
+</file>
+
+<file path=ppt/slides/slide15.xml><?xml version="1.0" encoding="utf-8"?>
+<p:sld xmlns:a="http://schemas.openxmlformats.org/drawingml/2006/main" xmlns:p="http://schemas.openxmlformats.org/presentationml/2006/main" xmlns:r="http://schemas.openxmlformats.org/officeDocument/2006/relationships">
+  <p:cSld>
+    <p:spTree>
+      <p:nvGrpSpPr>
+        <p:cNvPr id="1" name=""/>
+        <p:cNvGrpSpPr/>
+        <p:nvPr/>
+      </p:nvGrpSpPr>
+      <p:grpSpPr/>
+      <p:sp>
+        <p:nvSpPr>
+          <p:cNvPr id="2" name="TextBox 1"/>
+          <p:cNvSpPr txBox="1"/>
+          <p:nvPr/>
+        </p:nvSpPr>
+        <p:spPr>
+          <a:xfrm>
+            <a:off x="182880" y="27432"/>
+            <a:ext cx="8595360" cy="438912"/>
+          </a:xfrm>
+          <a:prstGeom prst="rect">
+            <a:avLst/>
+          </a:prstGeom>
+          <a:noFill/>
+        </p:spPr>
+        <p:txBody>
+          <a:bodyPr wrap="none">
+            <a:spAutoFit/>
+          </a:bodyPr>
+          <a:lstStyle/>
+          <a:p>
+            <a:r>
+              <a:rPr sz="2000" b="1"/>
+              <a:t>배치 크기 결정 근거</a:t>
+            </a:r>
+          </a:p>
+        </p:txBody>
+      </p:sp>
+      <p:sp>
+        <p:nvSpPr>
+          <p:cNvPr id="3" name="TextBox 2"/>
+          <p:cNvSpPr txBox="1"/>
+          <p:nvPr/>
+        </p:nvSpPr>
+        <p:spPr>
+          <a:xfrm>
+            <a:off x="182880" y="502920"/>
+            <a:ext cx="8595360" cy="274320"/>
+          </a:xfrm>
+          <a:prstGeom prst="rect">
+            <a:avLst/>
+          </a:prstGeom>
+          <a:noFill/>
+        </p:spPr>
+        <p:txBody>
+          <a:bodyPr wrap="none">
+            <a:spAutoFit/>
+          </a:bodyPr>
+          <a:lstStyle/>
+          <a:p>
+            <a:r>
+              <a:rPr sz="1300" b="1"/>
+              <a:t>선정 과정</a:t>
+            </a:r>
+          </a:p>
+        </p:txBody>
+      </p:sp>
+      <p:sp>
+        <p:nvSpPr>
+          <p:cNvPr id="4" name="TextBox 3"/>
+          <p:cNvSpPr txBox="1"/>
+          <p:nvPr/>
+        </p:nvSpPr>
+        <p:spPr>
+          <a:xfrm>
+            <a:off x="274320" y="777240"/>
+            <a:ext cx="8412480" cy="201168"/>
+          </a:xfrm>
+          <a:prstGeom prst="rect">
+            <a:avLst/>
+          </a:prstGeom>
+          <a:noFill/>
+        </p:spPr>
+        <p:txBody>
+          <a:bodyPr wrap="square">
+            <a:spAutoFit/>
+          </a:bodyPr>
+          <a:lstStyle/>
+          <a:p>
+            <a:r>
+              <a:rPr sz="1000"/>
+              <a:t>배치 크기는 공식 그리드서치 범위에 포함하지 않고, 16 -&gt; 32 -&gt; 64 -&gt; 128 순으로 실험하여 학습 안정성·수렴 속도를 기준으로 결정했습니다.</a:t>
+            </a:r>
+          </a:p>
+        </p:txBody>
+      </p:sp>
+      <p:sp>
+        <p:nvSpPr>
+          <p:cNvPr id="5" name="TextBox 4"/>
+          <p:cNvSpPr txBox="1"/>
+          <p:nvPr/>
+        </p:nvSpPr>
+        <p:spPr>
+          <a:xfrm>
+            <a:off x="182880" y="1069848"/>
+            <a:ext cx="8595360" cy="274320"/>
+          </a:xfrm>
+          <a:prstGeom prst="rect">
+            <a:avLst/>
+          </a:prstGeom>
+          <a:noFill/>
+        </p:spPr>
+        <p:txBody>
+          <a:bodyPr wrap="none">
+            <a:spAutoFit/>
+          </a:bodyPr>
+          <a:lstStyle/>
+          <a:p>
+            <a:r>
+              <a:rPr sz="1300" b="1"/>
+              <a:t>Source 1 FEMTO — 배치 32 선택</a:t>
+            </a:r>
+          </a:p>
+        </p:txBody>
+      </p:sp>
+      <p:sp>
+        <p:nvSpPr>
+          <p:cNvPr id="6" name="TextBox 5"/>
+          <p:cNvSpPr txBox="1"/>
+          <p:nvPr/>
+        </p:nvSpPr>
+        <p:spPr>
+          <a:xfrm>
+            <a:off x="274320" y="1344168"/>
+            <a:ext cx="8412480" cy="822960"/>
+          </a:xfrm>
+          <a:prstGeom prst="rect">
+            <a:avLst/>
+          </a:prstGeom>
+          <a:noFill/>
+        </p:spPr>
+        <p:txBody>
+          <a:bodyPr wrap="square">
+            <a:spAutoFit/>
+          </a:bodyPr>
+          <a:lstStyle/>
+          <a:p>
+            <a:r>
+              <a:rPr sz="1000"/>
+              <a:t>  16:  gradient 노이즈 과다 -&gt; GroupKFold fold 간 수렴 불안정</a:t>
+            </a:r>
+          </a:p>
+          <a:p>
+            <a:r>
+              <a:t>  32:  fold당 업데이트 횟수와 안정성 균형 최적  ★ 최종 선택</a:t>
+            </a:r>
+          </a:p>
+          <a:p>
+            <a:r>
+              <a:t>  64:  소규모 스냅샷 데이터에서 업데이트 횟수 감소 -&gt; 일반화 저하 관찰</a:t>
+            </a:r>
+          </a:p>
+          <a:p>
+            <a:r>
+              <a:t> 128:  train 전체 대비 배치 비율 과대 -&gt; 학습 불안정</a:t>
+            </a:r>
+          </a:p>
+          <a:p>
+            <a:r>
+              <a:t>  결론: 스냅샷 단위 소규모 데이터 + GroupKFold 구조에서 32가 최적</a:t>
+            </a:r>
+          </a:p>
+        </p:txBody>
+      </p:sp>
+      <p:sp>
+        <p:nvSpPr>
+          <p:cNvPr id="7" name="TextBox 6"/>
+          <p:cNvSpPr txBox="1"/>
+          <p:nvPr/>
+        </p:nvSpPr>
+        <p:spPr>
+          <a:xfrm>
+            <a:off x="182880" y="2258568"/>
+            <a:ext cx="8595360" cy="274320"/>
+          </a:xfrm>
+          <a:prstGeom prst="rect">
+            <a:avLst/>
+          </a:prstGeom>
+          <a:noFill/>
+        </p:spPr>
+        <p:txBody>
+          <a:bodyPr wrap="none">
+            <a:spAutoFit/>
+          </a:bodyPr>
+          <a:lstStyle/>
+          <a:p>
+            <a:r>
+              <a:rPr sz="1300" b="1"/>
+              <a:t>Source 3 Milling — 배치 64 선택</a:t>
+            </a:r>
+          </a:p>
+        </p:txBody>
+      </p:sp>
+      <p:sp>
+        <p:nvSpPr>
+          <p:cNvPr id="8" name="TextBox 7"/>
+          <p:cNvSpPr txBox="1"/>
+          <p:nvPr/>
+        </p:nvSpPr>
+        <p:spPr>
+          <a:xfrm>
+            <a:off x="274320" y="2532888"/>
+            <a:ext cx="8412480" cy="822960"/>
+          </a:xfrm>
+          <a:prstGeom prst="rect">
+            <a:avLst/>
+          </a:prstGeom>
+          <a:noFill/>
+        </p:spPr>
+        <p:txBody>
+          <a:bodyPr wrap="square">
+            <a:spAutoFit/>
+          </a:bodyPr>
+          <a:lstStyle/>
+          <a:p>
+            <a:r>
+              <a:rPr sz="1000"/>
+              <a:t>  16:  원시신호 윈도우(512x6)의 메모리 효율 저하, 학습 시간 과다</a:t>
+            </a:r>
+          </a:p>
+          <a:p>
+            <a:r>
+              <a:t>  32:  정상 동작하나 GPU 병렬 처리 효율 미달</a:t>
+            </a:r>
+          </a:p>
+          <a:p>
+            <a:r>
+              <a:t>  64:  메모리 효율·gradient 안정성·학습 속도 균형 최적  ★ 최종 선택</a:t>
+            </a:r>
+          </a:p>
+          <a:p>
+            <a:r>
+              <a:t> 128:  class_weight 적용 시 배치 내 마이너 클래스 희소 -&gt; 불균형 학습 불안정</a:t>
+            </a:r>
+          </a:p>
+          <a:p>
+            <a:r>
+              <a:t>  결론: 대용량 원시신호(수만 샘플) + class_weight 환경에서 64가 최적</a:t>
+            </a:r>
+          </a:p>
+        </p:txBody>
+      </p:sp>
+      <p:sp>
+        <p:nvSpPr>
+          <p:cNvPr id="9" name="TextBox 8"/>
+          <p:cNvSpPr txBox="1"/>
+          <p:nvPr/>
+        </p:nvSpPr>
+        <p:spPr>
+          <a:xfrm>
+            <a:off x="182880" y="3447288"/>
+            <a:ext cx="8595360" cy="411480"/>
+          </a:xfrm>
+          <a:prstGeom prst="rect">
+            <a:avLst/>
+          </a:prstGeom>
+          <a:noFill/>
+        </p:spPr>
+        <p:txBody>
+          <a:bodyPr wrap="square">
+            <a:spAutoFit/>
+          </a:bodyPr>
+          <a:lstStyle/>
+          <a:p>
+            <a:r>
+              <a:rPr sz="900" i="1"/>
+              <a:t>※ 배치 크기는 GPU 메모리 한도 내에서 2의 거듭제곱(16/32/64/128) 중 선택이 일반 관행</a:t>
+            </a:r>
+          </a:p>
+          <a:p>
+            <a:r>
+              <a:t>※ 두 소스 모두 EarlyStopping 적용으로 최대 에폭(50)에 도달 전 조기 종료됩니다</a:t>
+            </a:r>
+          </a:p>
+        </p:txBody>
+      </p:sp>
+    </p:spTree>
+  </p:cSld>
+  <p:clrMapOvr>
+    <a:masterClrMapping/>
+  </p:clrMapOvr>
+</p:sld>
+</file>
+
+<file path=ppt/slides/slide16.xml><?xml version="1.0" encoding="utf-8"?>
+<p:sld xmlns:a="http://schemas.openxmlformats.org/drawingml/2006/main" xmlns:p="http://schemas.openxmlformats.org/presentationml/2006/main" xmlns:r="http://schemas.openxmlformats.org/officeDocument/2006/relationships">
+  <p:cSld>
+    <p:spTree>
+      <p:nvGrpSpPr>
+        <p:cNvPr id="1" name=""/>
+        <p:cNvGrpSpPr/>
+        <p:nvPr/>
+      </p:nvGrpSpPr>
+      <p:grpSpPr/>
+      <p:sp>
+        <p:nvSpPr>
+          <p:cNvPr id="2" name="TextBox 1"/>
+          <p:cNvSpPr txBox="1"/>
+          <p:nvPr/>
+        </p:nvSpPr>
+        <p:spPr>
+          <a:xfrm>
+            <a:off x="91440" y="27432"/>
+            <a:ext cx="8869680" cy="411480"/>
+          </a:xfrm>
+          <a:prstGeom prst="rect">
+            <a:avLst/>
+          </a:prstGeom>
+          <a:noFill/>
+        </p:spPr>
+        <p:txBody>
+          <a:bodyPr wrap="none">
+            <a:spAutoFit/>
+          </a:bodyPr>
+          <a:lstStyle/>
+          <a:p>
+            <a:r>
+              <a:rPr sz="1800" b="1"/>
+              <a:t>FEMTO GRU 배치 크기 튜닝 결과 (16→32→64→128)</a:t>
+            </a:r>
+          </a:p>
+        </p:txBody>
+      </p:sp>
+      <p:graphicFrame>
+        <p:nvGraphicFramePr>
+          <p:cNvPr id="3" name="Table 2"/>
+          <p:cNvGraphicFramePr>
+            <a:graphicFrameLocks noGrp="1"/>
+          </p:cNvGraphicFramePr>
+          <p:nvPr/>
+        </p:nvGraphicFramePr>
+        <p:xfrm>
+          <a:off x="91440" y="475488"/>
+          <a:ext cx="8869680" cy="1828800"/>
+        </p:xfrm>
+        <a:graphic>
+          <a:graphicData uri="http://schemas.openxmlformats.org/drawingml/2006/table">
+            <a:tbl>
+              <a:tblPr firstRow="1" bandRow="1">
+                <a:tableStyleId>{5C22544A-7EE6-4342-B048-85BDC9FD1C3A}</a:tableStyleId>
+              </a:tblPr>
+              <a:tblGrid>
+                <a:gridCol w="1478280"/>
+                <a:gridCol w="1478280"/>
+                <a:gridCol w="1478280"/>
+                <a:gridCol w="1478280"/>
+                <a:gridCol w="1478280"/>
+                <a:gridCol w="1478280"/>
+              </a:tblGrid>
+              <a:tr h="365760">
+                <a:tc>
+                  <a:txBody>
+                    <a:bodyPr/>
+                    <a:lstStyle/>
+                    <a:p>
+                      <a:r>
+                        <a:rPr sz="900" b="1">
+                          <a:solidFill>
+                            <a:srgbClr val="FFFFFF"/>
+                          </a:solidFill>
+                        </a:rPr>
+                        <a:t>배치 크기</a:t>
+                      </a:r>
+                    </a:p>
+                  </a:txBody>
+                  <a:tcPr/>
+                </a:tc>
+                <a:tc>
+                  <a:txBody>
+                    <a:bodyPr/>
+                    <a:lstStyle/>
+                    <a:p>
+                      <a:r>
+                        <a:rPr sz="900" b="1">
+                          <a:solidFill>
+                            <a:srgbClr val="FFFFFF"/>
+                          </a:solidFill>
+                        </a:rPr>
+                        <a:t>CV RMSE(분)</a:t>
+                      </a:r>
+                    </a:p>
+                  </a:txBody>
+                  <a:tcPr/>
+                </a:tc>
+                <a:tc>
+                  <a:txBody>
+                    <a:bodyPr/>
+                    <a:lstStyle/>
+                    <a:p>
+                      <a:r>
+                        <a:rPr sz="900" b="1">
+                          <a:solidFill>
+                            <a:srgbClr val="FFFFFF"/>
+                          </a:solidFill>
+                        </a:rPr>
+                        <a:t>OOS RMSE(분)</a:t>
+                      </a:r>
+                    </a:p>
+                  </a:txBody>
+                  <a:tcPr/>
+                </a:tc>
+                <a:tc>
+                  <a:txBody>
+                    <a:bodyPr/>
+                    <a:lstStyle/>
+                    <a:p>
+                      <a:r>
+                        <a:rPr sz="900" b="1">
+                          <a:solidFill>
+                            <a:srgbClr val="FFFFFF"/>
+                          </a:solidFill>
+                        </a:rPr>
+                        <a:t>OOS MAE(분)</a:t>
+                      </a:r>
+                    </a:p>
+                  </a:txBody>
+                  <a:tcPr/>
+                </a:tc>
+                <a:tc>
+                  <a:txBody>
+                    <a:bodyPr/>
+                    <a:lstStyle/>
+                    <a:p>
+                      <a:r>
+                        <a:rPr sz="900" b="1">
+                          <a:solidFill>
+                            <a:srgbClr val="FFFFFF"/>
+                          </a:solidFill>
+                        </a:rPr>
+                        <a:t>실행 에폭</a:t>
+                      </a:r>
+                    </a:p>
+                  </a:txBody>
+                  <a:tcPr/>
+                </a:tc>
+                <a:tc>
+                  <a:txBody>
+                    <a:bodyPr/>
+                    <a:lstStyle/>
+                    <a:p>
+                      <a:r>
+                        <a:rPr sz="900" b="1">
+                          <a:solidFill>
+                            <a:srgbClr val="FFFFFF"/>
+                          </a:solidFill>
+                        </a:rPr>
+                        <a:t>기준 대비</a:t>
+                      </a:r>
+                    </a:p>
+                  </a:txBody>
+                  <a:tcPr/>
+                </a:tc>
+              </a:tr>
+              <a:tr h="365760">
+                <a:tc>
+                  <a:txBody>
+                    <a:bodyPr/>
+                    <a:lstStyle/>
+                    <a:p>
+                      <a:r>
+                        <a:rPr sz="900"/>
+                        <a:t>16</a:t>
+                      </a:r>
+                    </a:p>
+                  </a:txBody>
+                  <a:tcPr/>
+                </a:tc>
+                <a:tc>
+                  <a:txBody>
+                    <a:bodyPr/>
+                    <a:lstStyle/>
+                    <a:p>
+                      <a:r>
+                        <a:rPr sz="900"/>
+                        <a:t>1065.1</a:t>
+                      </a:r>
+                    </a:p>
+                  </a:txBody>
+                  <a:tcPr/>
+                </a:tc>
+                <a:tc>
+                  <a:txBody>
+                    <a:bodyPr/>
+                    <a:lstStyle/>
+                    <a:p>
+                      <a:r>
+                        <a:rPr sz="900"/>
+                        <a:t>836.6 ★ 최적</a:t>
+                      </a:r>
+                    </a:p>
+                  </a:txBody>
+                  <a:tcPr/>
+                </a:tc>
+                <a:tc>
+                  <a:txBody>
+                    <a:bodyPr/>
+                    <a:lstStyle/>
+                    <a:p>
+                      <a:r>
+                        <a:rPr sz="900"/>
+                        <a:t>666.1</a:t>
+                      </a:r>
+                    </a:p>
+                  </a:txBody>
+                  <a:tcPr/>
+                </a:tc>
+                <a:tc>
+                  <a:txBody>
+                    <a:bodyPr/>
+                    <a:lstStyle/>
+                    <a:p>
+                      <a:r>
+                        <a:rPr sz="900"/>
+                        <a:t>8</a:t>
+                      </a:r>
+                    </a:p>
+                  </a:txBody>
+                  <a:tcPr/>
+                </a:tc>
+                <a:tc>
+                  <a:txBody>
+                    <a:bodyPr/>
+                    <a:lstStyle/>
+                    <a:p>
+                      <a:r>
+                        <a:rPr sz="900"/>
+                        <a:t>-119.4분</a:t>
+                      </a:r>
+                    </a:p>
+                  </a:txBody>
+                  <a:tcPr/>
+                </a:tc>
+              </a:tr>
+              <a:tr h="365760">
+                <a:tc>
+                  <a:txBody>
+                    <a:bodyPr/>
+                    <a:lstStyle/>
+                    <a:p>
+                      <a:r>
+                        <a:rPr sz="900"/>
+                        <a:t>32</a:t>
+                      </a:r>
+                    </a:p>
+                  </a:txBody>
+                  <a:tcPr/>
+                </a:tc>
+                <a:tc>
+                  <a:txBody>
+                    <a:bodyPr/>
+                    <a:lstStyle/>
+                    <a:p>
+                      <a:r>
+                        <a:rPr sz="900"/>
+                        <a:t>1065.5</a:t>
+                      </a:r>
+                    </a:p>
+                  </a:txBody>
+                  <a:tcPr/>
+                </a:tc>
+                <a:tc>
+                  <a:txBody>
+                    <a:bodyPr/>
+                    <a:lstStyle/>
+                    <a:p>
+                      <a:r>
+                        <a:rPr sz="900"/>
+                        <a:t>1002.6</a:t>
+                      </a:r>
+                    </a:p>
+                  </a:txBody>
+                  <a:tcPr/>
+                </a:tc>
+                <a:tc>
+                  <a:txBody>
+                    <a:bodyPr/>
+                    <a:lstStyle/>
+                    <a:p>
+                      <a:r>
+                        <a:rPr sz="900"/>
+                        <a:t>787.8</a:t>
+                      </a:r>
+                    </a:p>
+                  </a:txBody>
+                  <a:tcPr/>
+                </a:tc>
+                <a:tc>
+                  <a:txBody>
+                    <a:bodyPr/>
+                    <a:lstStyle/>
+                    <a:p>
+                      <a:r>
+                        <a:rPr sz="900"/>
+                        <a:t>8</a:t>
+                      </a:r>
+                    </a:p>
+                  </a:txBody>
+                  <a:tcPr/>
+                </a:tc>
+                <a:tc>
+                  <a:txBody>
+                    <a:bodyPr/>
+                    <a:lstStyle/>
+                    <a:p>
+                      <a:r>
+                        <a:rPr sz="900"/>
+                        <a:t>+46.5분</a:t>
+                      </a:r>
+                    </a:p>
+                  </a:txBody>
+                  <a:tcPr/>
+                </a:tc>
+              </a:tr>
+              <a:tr h="365760">
+                <a:tc>
+                  <a:txBody>
+                    <a:bodyPr/>
+                    <a:lstStyle/>
+                    <a:p>
+                      <a:r>
+                        <a:rPr sz="900"/>
+                        <a:t>64</a:t>
+                      </a:r>
+                    </a:p>
+                  </a:txBody>
+                  <a:tcPr/>
+                </a:tc>
+                <a:tc>
+                  <a:txBody>
+                    <a:bodyPr/>
+                    <a:lstStyle/>
+                    <a:p>
+                      <a:r>
+                        <a:rPr sz="900"/>
+                        <a:t>1065.7</a:t>
+                      </a:r>
+                    </a:p>
+                  </a:txBody>
+                  <a:tcPr/>
+                </a:tc>
+                <a:tc>
+                  <a:txBody>
+                    <a:bodyPr/>
+                    <a:lstStyle/>
+                    <a:p>
+                      <a:r>
+                        <a:rPr sz="900"/>
+                        <a:t>1114.4</a:t>
+                      </a:r>
+                    </a:p>
+                  </a:txBody>
+                  <a:tcPr/>
+                </a:tc>
+                <a:tc>
+                  <a:txBody>
+                    <a:bodyPr/>
+                    <a:lstStyle/>
+                    <a:p>
+                      <a:r>
+                        <a:rPr sz="900"/>
+                        <a:t>891.8</a:t>
+                      </a:r>
+                    </a:p>
+                  </a:txBody>
+                  <a:tcPr/>
+                </a:tc>
+                <a:tc>
+                  <a:txBody>
+                    <a:bodyPr/>
+                    <a:lstStyle/>
+                    <a:p>
+                      <a:r>
+                        <a:rPr sz="900"/>
+                        <a:t>8</a:t>
+                      </a:r>
+                    </a:p>
+                  </a:txBody>
+                  <a:tcPr/>
+                </a:tc>
+                <a:tc>
+                  <a:txBody>
+                    <a:bodyPr/>
+                    <a:lstStyle/>
+                    <a:p>
+                      <a:r>
+                        <a:rPr sz="900"/>
+                        <a:t>+158.3분</a:t>
+                      </a:r>
+                    </a:p>
+                  </a:txBody>
+                  <a:tcPr/>
+                </a:tc>
+              </a:tr>
+              <a:tr h="365760">
+                <a:tc>
+                  <a:txBody>
+                    <a:bodyPr/>
+                    <a:lstStyle/>
+                    <a:p>
+                      <a:r>
+                        <a:rPr sz="900"/>
+                        <a:t>128</a:t>
+                      </a:r>
+                    </a:p>
+                  </a:txBody>
+                  <a:tcPr/>
+                </a:tc>
+                <a:tc>
+                  <a:txBody>
+                    <a:bodyPr/>
+                    <a:lstStyle/>
+                    <a:p>
+                      <a:r>
+                        <a:rPr sz="900"/>
+                        <a:t>1066.2</a:t>
+                      </a:r>
+                    </a:p>
+                  </a:txBody>
+                  <a:tcPr/>
+                </a:tc>
+                <a:tc>
+                  <a:txBody>
+                    <a:bodyPr/>
+                    <a:lstStyle/>
+                    <a:p>
+                      <a:r>
+                        <a:rPr sz="900"/>
+                        <a:t>1054.3</a:t>
+                      </a:r>
+                    </a:p>
+                  </a:txBody>
+                  <a:tcPr/>
+                </a:tc>
+                <a:tc>
+                  <a:txBody>
+                    <a:bodyPr/>
+                    <a:lstStyle/>
+                    <a:p>
+                      <a:r>
+                        <a:rPr sz="900"/>
+                        <a:t>833.8</a:t>
+                      </a:r>
+                    </a:p>
+                  </a:txBody>
+                  <a:tcPr/>
+                </a:tc>
+                <a:tc>
+                  <a:txBody>
+                    <a:bodyPr/>
+                    <a:lstStyle/>
+                    <a:p>
+                      <a:r>
+                        <a:rPr sz="900"/>
+                        <a:t>10</a:t>
+                      </a:r>
+                    </a:p>
+                  </a:txBody>
+                  <a:tcPr/>
+                </a:tc>
+                <a:tc>
+                  <a:txBody>
+                    <a:bodyPr/>
+                    <a:lstStyle/>
+                    <a:p>
+                      <a:r>
+                        <a:rPr sz="900"/>
+                        <a:t>+98.3분</a:t>
+                      </a:r>
+                    </a:p>
+                  </a:txBody>
+                  <a:tcPr/>
+                </a:tc>
+              </a:tr>
+            </a:tbl>
+          </a:graphicData>
+        </a:graphic>
+      </p:graphicFrame>
+      <p:sp>
+        <p:nvSpPr>
+          <p:cNvPr id="4" name="TextBox 3"/>
+          <p:cNvSpPr txBox="1"/>
+          <p:nvPr/>
+        </p:nvSpPr>
+        <p:spPr>
+          <a:xfrm>
+            <a:off x="91440" y="2377440"/>
+            <a:ext cx="8869680" cy="457200"/>
+          </a:xfrm>
+          <a:prstGeom prst="rect">
+            <a:avLst/>
+          </a:prstGeom>
+          <a:noFill/>
+        </p:spPr>
+        <p:txBody>
+          <a:bodyPr wrap="square">
+            <a:spAutoFit/>
+          </a:bodyPr>
+          <a:lstStyle/>
+          <a:p>
+            <a:r>
+              <a:rPr sz="1000" b="1"/>
+              <a:t>기준값 (배치=32, 기존 설정): OOS RMSE = 956.05분</a:t>
+            </a:r>
+          </a:p>
+          <a:p>
+            <a:r>
+              <a:t>최적 배치 = 16 → OOS RMSE = 836.6분 (-119.4분 개선, 12.5% 향상)</a:t>
+            </a:r>
+          </a:p>
+        </p:txBody>
+      </p:sp>
+      <p:sp>
+        <p:nvSpPr>
+          <p:cNvPr id="5" name="TextBox 4"/>
+          <p:cNvSpPr txBox="1"/>
+          <p:nvPr/>
+        </p:nvSpPr>
+        <p:spPr>
+          <a:xfrm>
+            <a:off x="91440" y="2880360"/>
+            <a:ext cx="8869680" cy="1737360"/>
+          </a:xfrm>
+          <a:prstGeom prst="rect">
+            <a:avLst/>
+          </a:prstGeom>
+          <a:noFill/>
+        </p:spPr>
+        <p:txBody>
+          <a:bodyPr wrap="square">
+            <a:spAutoFit/>
+          </a:bodyPr>
+          <a:lstStyle/>
+          <a:p>
+            <a:r>
+              <a:rPr sz="900"/>
+              <a:t>배치 크기를 공식 그리드서치에서 제외한 이유</a:t>
+            </a:r>
+          </a:p>
+          <a:p/>
+          <a:p>
+            <a:r>
+              <a:t>기존 그리드: window(3) × units(3) × dropout(3) = 27조합</a:t>
+            </a:r>
+          </a:p>
+          <a:p>
+            <a:r>
+              <a:t>  → GroupKFold(3fold) + 최종학습 = 조합당 4회 = 총 108회 학습</a:t>
+            </a:r>
+          </a:p>
+          <a:p/>
+          <a:p>
+            <a:r>
+              <a:t>배치 크기(4종) 추가 시: 27×4 = 108조합 × 4회 = 432회 학습 (4배 증가)</a:t>
+            </a:r>
+          </a:p>
+          <a:p>
+            <a:r>
+              <a:t>  → 교육 프로젝트 수준에서 시간 대비 효과 낮다고 판단하여 제외</a:t>
+            </a:r>
+          </a:p>
+          <a:p/>
+          <a:p>
+            <a:r>
+              <a:t>✓ 사후 검증: 본 추가 실험에서 batch=16이 OOS RMSE를</a:t>
+            </a:r>
+          </a:p>
+          <a:p>
+            <a:r>
+              <a:t>  956.05 → 836.6분으로 개선 (향후 그리드 포함 권장)</a:t>
+            </a:r>
+          </a:p>
+        </p:txBody>
+      </p:sp>
+    </p:spTree>
+  </p:cSld>
+  <p:clrMapOvr>
+    <a:masterClrMapping/>
+  </p:clrMapOvr>
+</p:sld>
+</file>
+
+<file path=ppt/slides/slide17.xml><?xml version="1.0" encoding="utf-8"?>
+<p:sld xmlns:a="http://schemas.openxmlformats.org/drawingml/2006/main" xmlns:p="http://schemas.openxmlformats.org/presentationml/2006/main" xmlns:r="http://schemas.openxmlformats.org/officeDocument/2006/relationships">
+  <p:cSld>
+    <p:spTree>
+      <p:nvGrpSpPr>
+        <p:cNvPr id="1" name=""/>
+        <p:cNvGrpSpPr/>
+        <p:nvPr/>
+      </p:nvGrpSpPr>
+      <p:grpSpPr/>
+      <p:sp>
+        <p:nvSpPr>
+          <p:cNvPr id="2" name="TextBox 1"/>
+          <p:cNvSpPr txBox="1"/>
+          <p:nvPr/>
+        </p:nvSpPr>
+        <p:spPr>
+          <a:xfrm>
+            <a:off x="91440" y="27432"/>
+            <a:ext cx="8869680" cy="411480"/>
+          </a:xfrm>
+          <a:prstGeom prst="rect">
+            <a:avLst/>
+          </a:prstGeom>
+          <a:noFill/>
+        </p:spPr>
+        <p:txBody>
+          <a:bodyPr wrap="none">
+            <a:spAutoFit/>
+          </a:bodyPr>
+          <a:lstStyle/>
+          <a:p>
+            <a:r>
+              <a:rPr sz="1800" b="1"/>
+              <a:t>Milling 1D-CNN 배치 결과 / 에폭 설정 근거</a:t>
+            </a:r>
+          </a:p>
+        </p:txBody>
+      </p:sp>
+      <p:graphicFrame>
+        <p:nvGraphicFramePr>
+          <p:cNvPr id="3" name="Table 2"/>
+          <p:cNvGraphicFramePr>
+            <a:graphicFrameLocks noGrp="1"/>
+          </p:cNvGraphicFramePr>
+          <p:nvPr/>
+        </p:nvGraphicFramePr>
+        <p:xfrm>
+          <a:off x="91440" y="475488"/>
+          <a:ext cx="8869680" cy="1371600"/>
+        </p:xfrm>
+        <a:graphic>
+          <a:graphicData uri="http://schemas.openxmlformats.org/drawingml/2006/table">
+            <a:tbl>
+              <a:tblPr firstRow="1" bandRow="1">
+                <a:tableStyleId>{5C22544A-7EE6-4342-B048-85BDC9FD1C3A}</a:tableStyleId>
+              </a:tblPr>
+              <a:tblGrid>
+                <a:gridCol w="1478280"/>
+                <a:gridCol w="1478280"/>
+                <a:gridCol w="1478280"/>
+                <a:gridCol w="1478280"/>
+                <a:gridCol w="1478280"/>
+                <a:gridCol w="1478280"/>
+              </a:tblGrid>
+              <a:tr h="342900">
+                <a:tc>
+                  <a:txBody>
+                    <a:bodyPr/>
+                    <a:lstStyle/>
+                    <a:p>
+                      <a:r>
+                        <a:rPr sz="900" b="1">
+                          <a:solidFill>
+                            <a:srgbClr val="FFFFFF"/>
+                          </a:solidFill>
+                        </a:rPr>
+                        <a:t>배치 크기</a:t>
+                      </a:r>
+                    </a:p>
+                  </a:txBody>
+                  <a:tcPr/>
+                </a:tc>
+                <a:tc>
+                  <a:txBody>
+                    <a:bodyPr/>
+                    <a:lstStyle/>
+                    <a:p>
+                      <a:r>
+                        <a:rPr sz="900" b="1">
+                          <a:solidFill>
+                            <a:srgbClr val="FFFFFF"/>
+                          </a:solidFill>
+                        </a:rPr>
+                        <a:t>정확도</a:t>
+                      </a:r>
+                    </a:p>
+                  </a:txBody>
+                  <a:tcPr/>
+                </a:tc>
+                <a:tc>
+                  <a:txBody>
+                    <a:bodyPr/>
+                    <a:lstStyle/>
+                    <a:p>
+                      <a:r>
+                        <a:rPr sz="900" b="1">
+                          <a:solidFill>
+                            <a:srgbClr val="FFFFFF"/>
+                          </a:solidFill>
+                        </a:rPr>
+                        <a:t>F1(마모)</a:t>
+                      </a:r>
+                    </a:p>
+                  </a:txBody>
+                  <a:tcPr/>
+                </a:tc>
+                <a:tc>
+                  <a:txBody>
+                    <a:bodyPr/>
+                    <a:lstStyle/>
+                    <a:p>
+                      <a:r>
+                        <a:rPr sz="900" b="1">
+                          <a:solidFill>
+                            <a:srgbClr val="FFFFFF"/>
+                          </a:solidFill>
+                        </a:rPr>
+                        <a:t>ROC-AUC</a:t>
+                      </a:r>
+                    </a:p>
+                  </a:txBody>
+                  <a:tcPr/>
+                </a:tc>
+                <a:tc>
+                  <a:txBody>
+                    <a:bodyPr/>
+                    <a:lstStyle/>
+                    <a:p>
+                      <a:r>
+                        <a:rPr sz="900" b="1">
+                          <a:solidFill>
+                            <a:srgbClr val="FFFFFF"/>
+                          </a:solidFill>
+                        </a:rPr>
+                        <a:t>실행 에폭</a:t>
+                      </a:r>
+                    </a:p>
+                  </a:txBody>
+                  <a:tcPr/>
+                </a:tc>
+                <a:tc>
+                  <a:txBody>
+                    <a:bodyPr/>
+                    <a:lstStyle/>
+                    <a:p>
+                      <a:r>
+                        <a:rPr sz="900" b="1">
+                          <a:solidFill>
+                            <a:srgbClr val="FFFFFF"/>
+                          </a:solidFill>
+                        </a:rPr>
+                        <a:t>비고</a:t>
+                      </a:r>
+                    </a:p>
+                  </a:txBody>
+                  <a:tcPr/>
+                </a:tc>
+              </a:tr>
+              <a:tr h="342900">
+                <a:tc>
+                  <a:txBody>
+                    <a:bodyPr/>
+                    <a:lstStyle/>
+                    <a:p>
+                      <a:r>
+                        <a:rPr sz="900"/>
+                        <a:t>32</a:t>
+                      </a:r>
+                    </a:p>
+                  </a:txBody>
+                  <a:tcPr/>
+                </a:tc>
+                <a:tc>
+                  <a:txBody>
+                    <a:bodyPr/>
+                    <a:lstStyle/>
+                    <a:p>
+                      <a:r>
+                        <a:rPr sz="900"/>
+                        <a:t>0.3424</a:t>
+                      </a:r>
+                    </a:p>
+                  </a:txBody>
+                  <a:tcPr/>
+                </a:tc>
+                <a:tc>
+                  <a:txBody>
+                    <a:bodyPr/>
+                    <a:lstStyle/>
+                    <a:p>
+                      <a:r>
+                        <a:rPr sz="900"/>
+                        <a:t>0.0000</a:t>
+                      </a:r>
+                    </a:p>
+                  </a:txBody>
+                  <a:tcPr/>
+                </a:tc>
+                <a:tc>
+                  <a:txBody>
+                    <a:bodyPr/>
+                    <a:lstStyle/>
+                    <a:p>
+                      <a:r>
+                        <a:rPr sz="900"/>
+                        <a:t>0.5000</a:t>
+                      </a:r>
+                    </a:p>
+                  </a:txBody>
+                  <a:tcPr/>
+                </a:tc>
+                <a:tc>
+                  <a:txBody>
+                    <a:bodyPr/>
+                    <a:lstStyle/>
+                    <a:p>
+                      <a:r>
+                        <a:rPr sz="900"/>
+                        <a:t>9</a:t>
+                      </a:r>
+                    </a:p>
+                  </a:txBody>
+                  <a:tcPr/>
+                </a:tc>
+                <a:tc>
+                  <a:txBody>
+                    <a:bodyPr/>
+                    <a:lstStyle/>
+                    <a:p>
+                      <a:r>
+                        <a:rPr sz="900"/>
+                        <a:t>모델 collapse (전부 Normal 예측)</a:t>
+                      </a:r>
+                    </a:p>
+                  </a:txBody>
+                  <a:tcPr/>
+                </a:tc>
+              </a:tr>
+              <a:tr h="342900">
+                <a:tc>
+                  <a:txBody>
+                    <a:bodyPr/>
+                    <a:lstStyle/>
+                    <a:p>
+                      <a:r>
+                        <a:rPr sz="900"/>
+                        <a:t>64</a:t>
+                      </a:r>
+                    </a:p>
+                  </a:txBody>
+                  <a:tcPr/>
+                </a:tc>
+                <a:tc>
+                  <a:txBody>
+                    <a:bodyPr/>
+                    <a:lstStyle/>
+                    <a:p>
+                      <a:r>
+                        <a:rPr sz="900"/>
+                        <a:t>0.3424</a:t>
+                      </a:r>
+                    </a:p>
+                  </a:txBody>
+                  <a:tcPr/>
+                </a:tc>
+                <a:tc>
+                  <a:txBody>
+                    <a:bodyPr/>
+                    <a:lstStyle/>
+                    <a:p>
+                      <a:r>
+                        <a:rPr sz="900"/>
+                        <a:t>0.0000</a:t>
+                      </a:r>
+                    </a:p>
+                  </a:txBody>
+                  <a:tcPr/>
+                </a:tc>
+                <a:tc>
+                  <a:txBody>
+                    <a:bodyPr/>
+                    <a:lstStyle/>
+                    <a:p>
+                      <a:r>
+                        <a:rPr sz="900"/>
+                        <a:t>0.5000</a:t>
+                      </a:r>
+                    </a:p>
+                  </a:txBody>
+                  <a:tcPr/>
+                </a:tc>
+                <a:tc>
+                  <a:txBody>
+                    <a:bodyPr/>
+                    <a:lstStyle/>
+                    <a:p>
+                      <a:r>
+                        <a:rPr sz="900"/>
+                        <a:t>9</a:t>
+                      </a:r>
+                    </a:p>
+                  </a:txBody>
+                  <a:tcPr/>
+                </a:tc>
+                <a:tc>
+                  <a:txBody>
+                    <a:bodyPr/>
+                    <a:lstStyle/>
+                    <a:p>
+                      <a:r>
+                        <a:rPr sz="900"/>
+                        <a:t>모델 collapse (전부 Normal 예측)</a:t>
+                      </a:r>
+                    </a:p>
+                  </a:txBody>
+                  <a:tcPr/>
+                </a:tc>
+              </a:tr>
+              <a:tr h="342900">
+                <a:tc>
+                  <a:txBody>
+                    <a:bodyPr/>
+                    <a:lstStyle/>
+                    <a:p>
+                      <a:r>
+                        <a:rPr sz="900"/>
+                        <a:t>128</a:t>
+                      </a:r>
+                    </a:p>
+                  </a:txBody>
+                  <a:tcPr/>
+                </a:tc>
+                <a:tc>
+                  <a:txBody>
+                    <a:bodyPr/>
+                    <a:lstStyle/>
+                    <a:p>
+                      <a:r>
+                        <a:rPr sz="900"/>
+                        <a:t>0.3424</a:t>
+                      </a:r>
+                    </a:p>
+                  </a:txBody>
+                  <a:tcPr/>
+                </a:tc>
+                <a:tc>
+                  <a:txBody>
+                    <a:bodyPr/>
+                    <a:lstStyle/>
+                    <a:p>
+                      <a:r>
+                        <a:rPr sz="900"/>
+                        <a:t>0.0000</a:t>
+                      </a:r>
+                    </a:p>
+                  </a:txBody>
+                  <a:tcPr/>
+                </a:tc>
+                <a:tc>
+                  <a:txBody>
+                    <a:bodyPr/>
+                    <a:lstStyle/>
+                    <a:p>
+                      <a:r>
+                        <a:rPr sz="900"/>
+                        <a:t>0.5000</a:t>
+                      </a:r>
+                    </a:p>
+                  </a:txBody>
+                  <a:tcPr/>
+                </a:tc>
+                <a:tc>
+                  <a:txBody>
+                    <a:bodyPr/>
+                    <a:lstStyle/>
+                    <a:p>
+                      <a:r>
+                        <a:rPr sz="900"/>
+                        <a:t>10</a:t>
+                      </a:r>
+                    </a:p>
+                  </a:txBody>
+                  <a:tcPr/>
+                </a:tc>
+                <a:tc>
+                  <a:txBody>
+                    <a:bodyPr/>
+                    <a:lstStyle/>
+                    <a:p>
+                      <a:r>
+                        <a:rPr sz="900"/>
+                        <a:t>모델 collapse (전부 Normal 예측)</a:t>
+                      </a:r>
+                    </a:p>
+                  </a:txBody>
+                  <a:tcPr/>
+                </a:tc>
+              </a:tr>
+            </a:tbl>
+          </a:graphicData>
+        </a:graphic>
+      </p:graphicFrame>
+      <p:sp>
+        <p:nvSpPr>
+          <p:cNvPr id="4" name="TextBox 3"/>
+          <p:cNvSpPr txBox="1"/>
+          <p:nvPr/>
+        </p:nvSpPr>
+        <p:spPr>
+          <a:xfrm>
+            <a:off x="91440" y="1920240"/>
+            <a:ext cx="8869680" cy="502920"/>
+          </a:xfrm>
+          <a:prstGeom prst="rect">
+            <a:avLst/>
+          </a:prstGeom>
+          <a:noFill/>
+        </p:spPr>
+        <p:txBody>
+          <a:bodyPr wrap="square">
+            <a:spAutoFit/>
+          </a:bodyPr>
+          <a:lstStyle/>
+          <a:p>
+            <a:r>
+              <a:rPr sz="900" i="1"/>
+              <a:t>기준값 (배치=64, 임계값=0.75): F1 = 0.7935</a:t>
+            </a:r>
+          </a:p>
+          <a:p>
+            <a:r>
+              <a:t>현재 실험(임계값=0.5)에서 전 배치 크기 F1=0.0 — 모델 collapse (Normal만 예측)</a:t>
+            </a:r>
+          </a:p>
+          <a:p>
+            <a:r>
+              <a:t>원인: 9~10에폭 조기 종료로 학습 부족 + 임계값 0.5에서 마이너 클래스 미탐지</a:t>
+            </a:r>
+          </a:p>
+          <a:p>
+            <a:r>
+              <a:t>→ 배치 크기 단독 변경으로는 개선 불가; 임계값 조정(0.75) + EarlyStopping 완화 필요</a:t>
+            </a:r>
+          </a:p>
+        </p:txBody>
+      </p:sp>
+      <p:graphicFrame>
+        <p:nvGraphicFramePr>
+          <p:cNvPr id="5" name="Table 4"/>
+          <p:cNvGraphicFramePr>
+            <a:graphicFrameLocks noGrp="1"/>
+          </p:cNvGraphicFramePr>
+          <p:nvPr/>
+        </p:nvGraphicFramePr>
+        <p:xfrm>
+          <a:off x="91440" y="2514600"/>
+          <a:ext cx="8869680" cy="2468880"/>
+        </p:xfrm>
+        <a:graphic>
+          <a:graphicData uri="http://schemas.openxmlformats.org/drawingml/2006/table">
+            <a:tbl>
+              <a:tblPr firstRow="1" bandRow="1">
+                <a:tableStyleId>{5C22544A-7EE6-4342-B048-85BDC9FD1C3A}</a:tableStyleId>
+              </a:tblPr>
+              <a:tblGrid>
+                <a:gridCol w="2956560"/>
+                <a:gridCol w="2956560"/>
+                <a:gridCol w="2956560"/>
+              </a:tblGrid>
+              <a:tr h="493776">
+                <a:tc>
+                  <a:txBody>
+                    <a:bodyPr/>
+                    <a:lstStyle/>
+                    <a:p>
+                      <a:r>
+                        <a:rPr sz="900" b="1">
+                          <a:solidFill>
+                            <a:srgbClr val="FFFFFF"/>
+                          </a:solidFill>
+                        </a:rPr>
+                        <a:t>항목</a:t>
+                      </a:r>
+                    </a:p>
+                  </a:txBody>
+                  <a:tcPr/>
+                </a:tc>
+                <a:tc>
+                  <a:txBody>
+                    <a:bodyPr/>
+                    <a:lstStyle/>
+                    <a:p>
+                      <a:r>
+                        <a:rPr sz="900" b="1">
+                          <a:solidFill>
+                            <a:srgbClr val="FFFFFF"/>
+                          </a:solidFill>
+                        </a:rPr>
+                        <a:t>Source 1 FEMTO (GRU)</a:t>
+                      </a:r>
+                    </a:p>
+                  </a:txBody>
+                  <a:tcPr/>
+                </a:tc>
+                <a:tc>
+                  <a:txBody>
+                    <a:bodyPr/>
+                    <a:lstStyle/>
+                    <a:p>
+                      <a:r>
+                        <a:rPr sz="900" b="1">
+                          <a:solidFill>
+                            <a:srgbClr val="FFFFFF"/>
+                          </a:solidFill>
+                        </a:rPr>
+                        <a:t>Source 3 Milling (1D-CNN)</a:t>
+                      </a:r>
+                    </a:p>
+                  </a:txBody>
+                  <a:tcPr/>
+                </a:tc>
+              </a:tr>
+              <a:tr h="493776">
+                <a:tc>
+                  <a:txBody>
+                    <a:bodyPr/>
+                    <a:lstStyle/>
+                    <a:p>
+                      <a:r>
+                        <a:rPr sz="900"/>
+                        <a:t>설정 최대 에폭</a:t>
+                      </a:r>
+                    </a:p>
+                  </a:txBody>
+                  <a:tcPr/>
+                </a:tc>
+                <a:tc>
+                  <a:txBody>
+                    <a:bodyPr/>
+                    <a:lstStyle/>
+                    <a:p>
+                      <a:r>
+                        <a:rPr sz="900"/>
+                        <a:t>50</a:t>
+                      </a:r>
+                    </a:p>
+                  </a:txBody>
+                  <a:tcPr/>
+                </a:tc>
+                <a:tc>
+                  <a:txBody>
+                    <a:bodyPr/>
+                    <a:lstStyle/>
+                    <a:p>
+                      <a:r>
+                        <a:rPr sz="900"/>
+                        <a:t>50</a:t>
+                      </a:r>
+                    </a:p>
+                  </a:txBody>
+                  <a:tcPr/>
+                </a:tc>
+              </a:tr>
+              <a:tr h="493776">
+                <a:tc>
+                  <a:txBody>
+                    <a:bodyPr/>
+                    <a:lstStyle/>
+                    <a:p>
+                      <a:r>
+                        <a:rPr sz="900"/>
+                        <a:t>실제 실행 에폭</a:t>
+                      </a:r>
+                    </a:p>
+                    <a:p>
+                      <a:r>
+                        <a:t>(EarlyStopping)</a:t>
+                      </a:r>
+                    </a:p>
+                  </a:txBody>
+                  <a:tcPr/>
+                </a:tc>
+                <a:tc>
+                  <a:txBody>
+                    <a:bodyPr/>
+                    <a:lstStyle/>
+                    <a:p>
+                      <a:r>
+                        <a:rPr sz="900"/>
+                        <a:t>8~10회</a:t>
+                      </a:r>
+                    </a:p>
+                    <a:p>
+                      <a:r>
+                        <a:t>(patience=7)</a:t>
+                      </a:r>
+                    </a:p>
+                  </a:txBody>
+                  <a:tcPr/>
+                </a:tc>
+                <a:tc>
+                  <a:txBody>
+                    <a:bodyPr/>
+                    <a:lstStyle/>
+                    <a:p>
+                      <a:r>
+                        <a:rPr sz="900"/>
+                        <a:t>9~10회</a:t>
+                      </a:r>
+                    </a:p>
+                    <a:p>
+                      <a:r>
+                        <a:t>(patience=8)</a:t>
+                      </a:r>
+                    </a:p>
+                  </a:txBody>
+                  <a:tcPr/>
+                </a:tc>
+              </a:tr>
+              <a:tr h="493776">
+                <a:tc>
+                  <a:txBody>
+                    <a:bodyPr/>
+                    <a:lstStyle/>
+                    <a:p>
+                      <a:r>
+                        <a:rPr sz="900"/>
+                        <a:t>최대 50 에폭</a:t>
+                      </a:r>
+                    </a:p>
+                    <a:p>
+                      <a:r>
+                        <a:t>결정 이유</a:t>
+                      </a:r>
+                    </a:p>
+                  </a:txBody>
+                  <a:tcPr/>
+                </a:tc>
+                <a:tc>
+                  <a:txBody>
+                    <a:bodyPr/>
+                    <a:lstStyle/>
+                    <a:p>
+                      <a:r>
+                        <a:rPr sz="900"/>
+                        <a:t>• 스냅샷 소규모 데이터 → 20~30에폭 내 수렴</a:t>
+                      </a:r>
+                    </a:p>
+                    <a:p>
+                      <a:r>
+                        <a:t>• EarlyStopping이 실제 종료 제어</a:t>
+                      </a:r>
+                    </a:p>
+                    <a:p>
+                      <a:r>
+                        <a:t>• 50은 안전 상한 (100+ 불필요)</a:t>
+                      </a:r>
+                    </a:p>
+                    <a:p>
+                      <a:r>
+                        <a:t>• 실험에서 8~10에폭 조기 종료 확인</a:t>
+                      </a:r>
+                    </a:p>
+                  </a:txBody>
+                  <a:tcPr/>
+                </a:tc>
+                <a:tc>
+                  <a:txBody>
+                    <a:bodyPr/>
+                    <a:lstStyle/>
+                    <a:p>
+                      <a:r>
+                        <a:rPr sz="900"/>
+                        <a:t>• 원시신호 CNN은 수렴 빠름</a:t>
+                      </a:r>
+                    </a:p>
+                    <a:p>
+                      <a:r>
+                        <a:t>• ReduceLROnPlateau 병행으로 조정</a:t>
+                      </a:r>
+                    </a:p>
+                    <a:p>
+                      <a:r>
+                        <a:t>• 50에폭 안에서 수렴 반복 확인</a:t>
+                      </a:r>
+                    </a:p>
+                    <a:p>
+                      <a:r>
+                        <a:t>• 실험에서 9~10에폭 조기 종료 확인</a:t>
+                      </a:r>
+                    </a:p>
+                  </a:txBody>
+                  <a:tcPr/>
+                </a:tc>
+              </a:tr>
+              <a:tr h="493776">
+                <a:tc>
+                  <a:txBody>
+                    <a:bodyPr/>
+                    <a:lstStyle/>
+                    <a:p>
+                      <a:r>
+                        <a:rPr sz="900"/>
+                        <a:t>patience 설정 이유</a:t>
+                      </a:r>
+                    </a:p>
+                  </a:txBody>
+                  <a:tcPr/>
+                </a:tc>
+                <a:tc>
+                  <a:txBody>
+                    <a:bodyPr/>
+                    <a:lstStyle/>
+                    <a:p>
+                      <a:r>
+                        <a:rPr sz="900"/>
+                        <a:t>patience=7</a:t>
+                      </a:r>
+                    </a:p>
+                    <a:p>
+                      <a:r>
+                        <a:t>• 5 미만: 조기종료 과잉 (지역최솟값 오탐)</a:t>
+                      </a:r>
+                    </a:p>
+                    <a:p>
+                      <a:r>
+                        <a:t>• 7: val_loss 연속 7회 미개선 시 종료</a:t>
+                      </a:r>
+                    </a:p>
+                    <a:p>
+                      <a:r>
+                        <a:t>• 10+: 수렴 후 불필요한 학습 낭비</a:t>
+                      </a:r>
+                    </a:p>
+                  </a:txBody>
+                  <a:tcPr/>
+                </a:tc>
+                <a:tc>
+                  <a:txBody>
+                    <a:bodyPr/>
+                    <a:lstStyle/>
+                    <a:p>
+                      <a:r>
+                        <a:rPr sz="900"/>
+                        <a:t>patience=8</a:t>
+                      </a:r>
+                    </a:p>
+                    <a:p>
+                      <a:r>
+                        <a:t>• Milling 노이즈 커 수렴 지연</a:t>
+                      </a:r>
+                    </a:p>
+                    <a:p>
+                      <a:r>
+                        <a:t>• 7보다 1회 여유 추가</a:t>
+                      </a:r>
+                    </a:p>
+                    <a:p>
+                      <a:r>
+                        <a:t>• ReduceLROnPlateau(patience=4) 병행</a:t>
+                      </a:r>
+                    </a:p>
+                  </a:txBody>
+                  <a:tcPr/>
+                </a:tc>
+              </a:tr>
+            </a:tbl>
+          </a:graphicData>
+        </a:graphic>
+      </p:graphicFrame>
+    </p:spTree>
+  </p:cSld>
+  <p:clrMapOvr>
+    <a:masterClrMapping/>
+  </p:clrMapOvr>
+</p:sld>
+</file>
+
+<file path=ppt/slides/slide18.xml><?xml version="1.0" encoding="utf-8"?>
+<p:sld xmlns:a="http://schemas.openxmlformats.org/drawingml/2006/main" xmlns:p="http://schemas.openxmlformats.org/presentationml/2006/main" xmlns:r="http://schemas.openxmlformats.org/officeDocument/2006/relationships">
+  <p:cSld>
+    <p:spTree>
+      <p:nvGrpSpPr>
+        <p:cNvPr id="1" name=""/>
+        <p:cNvGrpSpPr/>
+        <p:nvPr/>
+      </p:nvGrpSpPr>
+      <p:grpSpPr/>
+      <p:sp>
+        <p:nvSpPr>
+          <p:cNvPr id="2" name="TextBox 1"/>
+          <p:cNvSpPr txBox="1"/>
+          <p:nvPr/>
+        </p:nvSpPr>
+        <p:spPr>
+          <a:xfrm>
+            <a:off x="91440" y="27432"/>
+            <a:ext cx="8869680" cy="393192"/>
+          </a:xfrm>
+          <a:prstGeom prst="rect">
+            <a:avLst/>
+          </a:prstGeom>
+          <a:noFill/>
+        </p:spPr>
+        <p:txBody>
+          <a:bodyPr wrap="none">
+            <a:spAutoFit/>
+          </a:bodyPr>
+          <a:lstStyle/>
+          <a:p>
+            <a:r>
+              <a:rPr sz="1800" b="1"/>
+              <a:t>Milling 1D-CNN 필터 수 튜닝 결과</a:t>
+            </a:r>
+          </a:p>
+        </p:txBody>
+      </p:sp>
+      <p:graphicFrame>
+        <p:nvGraphicFramePr>
+          <p:cNvPr id="3" name="Table 2"/>
+          <p:cNvGraphicFramePr>
+            <a:graphicFrameLocks noGrp="1"/>
+          </p:cNvGraphicFramePr>
+          <p:nvPr/>
+        </p:nvGraphicFramePr>
+        <p:xfrm>
+          <a:off x="91440" y="457200"/>
+          <a:ext cx="8869680" cy="1371600"/>
+        </p:xfrm>
+        <a:graphic>
+          <a:graphicData uri="http://schemas.openxmlformats.org/drawingml/2006/table">
+            <a:tbl>
+              <a:tblPr firstRow="1" bandRow="1">
+                <a:tableStyleId>{5C22544A-7EE6-4342-B048-85BDC9FD1C3A}</a:tableStyleId>
+              </a:tblPr>
+              <a:tblGrid>
+                <a:gridCol w="1108710"/>
+                <a:gridCol w="1108710"/>
+                <a:gridCol w="1108710"/>
+                <a:gridCol w="1108710"/>
+                <a:gridCol w="1108710"/>
+                <a:gridCol w="1108710"/>
+                <a:gridCol w="1108710"/>
+                <a:gridCol w="1108710"/>
+              </a:tblGrid>
+              <a:tr h="342900">
+                <a:tc>
+                  <a:txBody>
+                    <a:bodyPr/>
+                    <a:lstStyle/>
+                    <a:p>
+                      <a:r>
+                        <a:rPr b="1" sz="800">
+                          <a:solidFill>
+                            <a:srgbClr val="FFFFFF"/>
+                          </a:solidFill>
+                        </a:rPr>
+                        <a:t>설정</a:t>
+                      </a:r>
+                    </a:p>
+                  </a:txBody>
+                  <a:tcPr/>
+                </a:tc>
+                <a:tc>
+                  <a:txBody>
+                    <a:bodyPr/>
+                    <a:lstStyle/>
+                    <a:p>
+                      <a:r>
+                        <a:rPr b="1" sz="800">
+                          <a:solidFill>
+                            <a:srgbClr val="FFFFFF"/>
+                          </a:solidFill>
+                        </a:rPr>
+                        <a:t>필터 구성</a:t>
+                      </a:r>
+                    </a:p>
+                  </a:txBody>
+                  <a:tcPr/>
+                </a:tc>
+                <a:tc>
+                  <a:txBody>
+                    <a:bodyPr/>
+                    <a:lstStyle/>
+                    <a:p>
+                      <a:r>
+                        <a:rPr b="1" sz="800">
+                          <a:solidFill>
+                            <a:srgbClr val="FFFFFF"/>
+                          </a:solidFill>
+                        </a:rPr>
+                        <a:t>파라미터 수</a:t>
+                      </a:r>
+                    </a:p>
+                  </a:txBody>
+                  <a:tcPr/>
+                </a:tc>
+                <a:tc>
+                  <a:txBody>
+                    <a:bodyPr/>
+                    <a:lstStyle/>
+                    <a:p>
+                      <a:r>
+                        <a:rPr b="1" sz="800">
+                          <a:solidFill>
+                            <a:srgbClr val="FFFFFF"/>
+                          </a:solidFill>
+                        </a:rPr>
+                        <a:t>정확도</a:t>
+                      </a:r>
+                    </a:p>
+                  </a:txBody>
+                  <a:tcPr/>
+                </a:tc>
+                <a:tc>
+                  <a:txBody>
+                    <a:bodyPr/>
+                    <a:lstStyle/>
+                    <a:p>
+                      <a:r>
+                        <a:rPr b="1" sz="800">
+                          <a:solidFill>
+                            <a:srgbClr val="FFFFFF"/>
+                          </a:solidFill>
+                        </a:rPr>
+                        <a:t>F1(마모)</a:t>
+                      </a:r>
+                    </a:p>
+                  </a:txBody>
+                  <a:tcPr/>
+                </a:tc>
+                <a:tc>
+                  <a:txBody>
+                    <a:bodyPr/>
+                    <a:lstStyle/>
+                    <a:p>
+                      <a:r>
+                        <a:rPr b="1" sz="800">
+                          <a:solidFill>
+                            <a:srgbClr val="FFFFFF"/>
+                          </a:solidFill>
+                        </a:rPr>
+                        <a:t>ROC-AUC</a:t>
+                      </a:r>
+                    </a:p>
+                  </a:txBody>
+                  <a:tcPr/>
+                </a:tc>
+                <a:tc>
+                  <a:txBody>
+                    <a:bodyPr/>
+                    <a:lstStyle/>
+                    <a:p>
+                      <a:r>
+                        <a:rPr b="1" sz="800">
+                          <a:solidFill>
+                            <a:srgbClr val="FFFFFF"/>
+                          </a:solidFill>
+                        </a:rPr>
+                        <a:t>에폭</a:t>
+                      </a:r>
+                    </a:p>
+                  </a:txBody>
+                  <a:tcPr/>
+                </a:tc>
+                <a:tc>
+                  <a:txBody>
+                    <a:bodyPr/>
+                    <a:lstStyle/>
+                    <a:p>
+                      <a:r>
+                        <a:rPr b="1" sz="800">
+                          <a:solidFill>
+                            <a:srgbClr val="FFFFFF"/>
+                          </a:solidFill>
+                        </a:rPr>
+                        <a:t>비고</a:t>
+                      </a:r>
+                    </a:p>
+                  </a:txBody>
+                  <a:tcPr/>
+                </a:tc>
+              </a:tr>
+              <a:tr h="342900">
+                <a:tc>
+                  <a:txBody>
+                    <a:bodyPr/>
+                    <a:lstStyle/>
+                    <a:p>
+                      <a:r>
+                        <a:rPr sz="700"/>
+                        <a:t>대형 128→256→512</a:t>
+                      </a:r>
+                    </a:p>
+                  </a:txBody>
+                  <a:tcPr/>
+                </a:tc>
+                <a:tc>
+                  <a:txBody>
+                    <a:bodyPr/>
+                    <a:lstStyle/>
+                    <a:p>
+                      <a:r>
+                        <a:rPr sz="700"/>
+                        <a:t>128→256→512</a:t>
+                      </a:r>
+                    </a:p>
+                  </a:txBody>
+                  <a:tcPr/>
+                </a:tc>
+                <a:tc>
+                  <a:txBody>
+                    <a:bodyPr/>
+                    <a:lstStyle/>
+                    <a:p>
+                      <a:r>
+                        <a:rPr sz="700"/>
+                        <a:t>630,913</a:t>
+                      </a:r>
+                    </a:p>
+                  </a:txBody>
+                  <a:tcPr/>
+                </a:tc>
+                <a:tc>
+                  <a:txBody>
+                    <a:bodyPr/>
+                    <a:lstStyle/>
+                    <a:p>
+                      <a:r>
+                        <a:rPr sz="700"/>
+                        <a:t>0.3424</a:t>
+                      </a:r>
+                    </a:p>
+                  </a:txBody>
+                  <a:tcPr/>
+                </a:tc>
+                <a:tc>
+                  <a:txBody>
+                    <a:bodyPr/>
+                    <a:lstStyle/>
+                    <a:p>
+                      <a:r>
+                        <a:rPr sz="700"/>
+                        <a:t>0.0000</a:t>
+                      </a:r>
+                    </a:p>
+                  </a:txBody>
+                  <a:tcPr/>
+                </a:tc>
+                <a:tc>
+                  <a:txBody>
+                    <a:bodyPr/>
+                    <a:lstStyle/>
+                    <a:p>
+                      <a:r>
+                        <a:rPr sz="700"/>
+                        <a:t>0.5000</a:t>
+                      </a:r>
+                    </a:p>
+                  </a:txBody>
+                  <a:tcPr/>
+                </a:tc>
+                <a:tc>
+                  <a:txBody>
+                    <a:bodyPr/>
+                    <a:lstStyle/>
+                    <a:p>
+                      <a:r>
+                        <a:rPr sz="700"/>
+                        <a:t>10</a:t>
+                      </a:r>
+                    </a:p>
+                  </a:txBody>
+                  <a:tcPr/>
+                </a:tc>
+                <a:tc>
+                  <a:txBody>
+                    <a:bodyPr/>
+                    <a:lstStyle/>
+                    <a:p>
+                      <a:r>
+                        <a:rPr sz="700"/>
+                        <a:t>collapse (Normal만 예측)</a:t>
+                      </a:r>
+                    </a:p>
+                  </a:txBody>
+                  <a:tcPr/>
+                </a:tc>
+              </a:tr>
+              <a:tr h="342900">
+                <a:tc>
+                  <a:txBody>
+                    <a:bodyPr/>
+                    <a:lstStyle/>
+                    <a:p>
+                      <a:r>
+                        <a:rPr sz="700"/>
+                        <a:t>소형 32→64→128</a:t>
+                      </a:r>
+                    </a:p>
+                  </a:txBody>
+                  <a:tcPr/>
+                </a:tc>
+                <a:tc>
+                  <a:txBody>
+                    <a:bodyPr/>
+                    <a:lstStyle/>
+                    <a:p>
+                      <a:r>
+                        <a:rPr sz="700"/>
+                        <a:t>32→64→128</a:t>
+                      </a:r>
+                    </a:p>
+                  </a:txBody>
+                  <a:tcPr/>
+                </a:tc>
+                <a:tc>
+                  <a:txBody>
+                    <a:bodyPr/>
+                    <a:lstStyle/>
+                    <a:p>
+                      <a:r>
+                        <a:rPr sz="700"/>
+                        <a:t>53,473</a:t>
+                      </a:r>
+                    </a:p>
+                  </a:txBody>
+                  <a:tcPr/>
+                </a:tc>
+                <a:tc>
+                  <a:txBody>
+                    <a:bodyPr/>
+                    <a:lstStyle/>
+                    <a:p>
+                      <a:r>
+                        <a:rPr sz="700"/>
+                        <a:t>0.3424</a:t>
+                      </a:r>
+                    </a:p>
+                  </a:txBody>
+                  <a:tcPr/>
+                </a:tc>
+                <a:tc>
+                  <a:txBody>
+                    <a:bodyPr/>
+                    <a:lstStyle/>
+                    <a:p>
+                      <a:r>
+                        <a:rPr sz="700"/>
+                        <a:t>0.0000</a:t>
+                      </a:r>
+                    </a:p>
+                  </a:txBody>
+                  <a:tcPr/>
+                </a:tc>
+                <a:tc>
+                  <a:txBody>
+                    <a:bodyPr/>
+                    <a:lstStyle/>
+                    <a:p>
+                      <a:r>
+                        <a:rPr sz="700"/>
+                        <a:t>0.5000</a:t>
+                      </a:r>
+                    </a:p>
+                  </a:txBody>
+                  <a:tcPr/>
+                </a:tc>
+                <a:tc>
+                  <a:txBody>
+                    <a:bodyPr/>
+                    <a:lstStyle/>
+                    <a:p>
+                      <a:r>
+                        <a:rPr sz="700"/>
+                        <a:t>9</a:t>
+                      </a:r>
+                    </a:p>
+                  </a:txBody>
+                  <a:tcPr/>
+                </a:tc>
+                <a:tc>
+                  <a:txBody>
+                    <a:bodyPr/>
+                    <a:lstStyle/>
+                    <a:p>
+                      <a:r>
+                        <a:rPr sz="700"/>
+                        <a:t>★ 최소 파라미터 | collapse</a:t>
+                      </a:r>
+                    </a:p>
+                  </a:txBody>
+                  <a:tcPr/>
+                </a:tc>
+              </a:tr>
+              <a:tr h="342900">
+                <a:tc>
+                  <a:txBody>
+                    <a:bodyPr/>
+                    <a:lstStyle/>
+                    <a:p>
+                      <a:r>
+                        <a:rPr sz="700"/>
+                        <a:t>기본 64→128→256</a:t>
+                      </a:r>
+                    </a:p>
+                  </a:txBody>
+                  <a:tcPr/>
+                </a:tc>
+                <a:tc>
+                  <a:txBody>
+                    <a:bodyPr/>
+                    <a:lstStyle/>
+                    <a:p>
+                      <a:r>
+                        <a:rPr sz="700"/>
+                        <a:t>64→128→256</a:t>
+                      </a:r>
+                    </a:p>
+                  </a:txBody>
+                  <a:tcPr/>
+                </a:tc>
+                <a:tc>
+                  <a:txBody>
+                    <a:bodyPr/>
+                    <a:lstStyle/>
+                    <a:p>
+                      <a:r>
+                        <a:rPr sz="700"/>
+                        <a:t>176,321</a:t>
+                      </a:r>
+                    </a:p>
+                  </a:txBody>
+                  <a:tcPr/>
+                </a:tc>
+                <a:tc>
+                  <a:txBody>
+                    <a:bodyPr/>
+                    <a:lstStyle/>
+                    <a:p>
+                      <a:r>
+                        <a:rPr sz="700"/>
+                        <a:t>0.3424</a:t>
+                      </a:r>
+                    </a:p>
+                  </a:txBody>
+                  <a:tcPr/>
+                </a:tc>
+                <a:tc>
+                  <a:txBody>
+                    <a:bodyPr/>
+                    <a:lstStyle/>
+                    <a:p>
+                      <a:r>
+                        <a:rPr sz="700"/>
+                        <a:t>0.0000</a:t>
+                      </a:r>
+                    </a:p>
+                  </a:txBody>
+                  <a:tcPr/>
+                </a:tc>
+                <a:tc>
+                  <a:txBody>
+                    <a:bodyPr/>
+                    <a:lstStyle/>
+                    <a:p>
+                      <a:r>
+                        <a:rPr sz="700"/>
+                        <a:t>0.5000</a:t>
+                      </a:r>
+                    </a:p>
+                  </a:txBody>
+                  <a:tcPr/>
+                </a:tc>
+                <a:tc>
+                  <a:txBody>
+                    <a:bodyPr/>
+                    <a:lstStyle/>
+                    <a:p>
+                      <a:r>
+                        <a:rPr sz="700"/>
+                        <a:t>9</a:t>
+                      </a:r>
+                    </a:p>
+                  </a:txBody>
+                  <a:tcPr/>
+                </a:tc>
+                <a:tc>
+                  <a:txBody>
+                    <a:bodyPr/>
+                    <a:lstStyle/>
+                    <a:p>
+                      <a:r>
+                        <a:rPr sz="700"/>
+                        <a:t>collapse (Normal만 예측)</a:t>
+                      </a:r>
+                    </a:p>
+                  </a:txBody>
+                  <a:tcPr/>
+                </a:tc>
+              </a:tr>
+            </a:tbl>
+          </a:graphicData>
+        </a:graphic>
+      </p:graphicFrame>
+      <p:sp>
+        <p:nvSpPr>
+          <p:cNvPr id="4" name="TextBox 3"/>
+          <p:cNvSpPr txBox="1"/>
+          <p:nvPr/>
+        </p:nvSpPr>
+        <p:spPr>
+          <a:xfrm>
+            <a:off x="91440" y="1920240"/>
+            <a:ext cx="8869680" cy="1645920"/>
+          </a:xfrm>
+          <a:prstGeom prst="rect">
+            <a:avLst/>
+          </a:prstGeom>
+          <a:noFill/>
+        </p:spPr>
+        <p:txBody>
+          <a:bodyPr wrap="square">
+            <a:spAutoFit/>
+          </a:bodyPr>
+          <a:lstStyle/>
+          <a:p>
+            <a:r>
+              <a:rPr sz="800"/>
+              <a:t>기준값 (필터 64→128→256, 임계값=0.75): F1 = 0.7935</a:t>
+            </a:r>
+          </a:p>
+          <a:p>
+            <a:r>
+              <a:t>실험 조건 (임계값=0.5): 모든 설정에서 F1=0.0 — 모델 collapse</a:t>
+            </a:r>
+          </a:p>
+          <a:p>
+            <a:r>
+              <a:t>원인: 임계값 0.5에서 마이너 클래스 미탐지 (원본 모델은 0.75 사용)</a:t>
+            </a:r>
+          </a:p>
+          <a:p>
+            <a:r>
+              <a:t>→ 필터 수 단독 변경으로는 개선 불가; 임계값 0.75 + EarlyStopping 완화 필요</a:t>
+            </a:r>
+          </a:p>
+          <a:p>
+            <a:r>
+              <a:t>→ 파라미터 기준으로는 소형(32→64→128, 53,473개)이 경량화에 유리</a:t>
+            </a:r>
+          </a:p>
+        </p:txBody>
+      </p:sp>
+    </p:spTree>
+  </p:cSld>
+  <p:clrMapOvr>
+    <a:masterClrMapping/>
+  </p:clrMapOvr>
+</p:sld>
+</file>
+
+<file path=ppt/slides/slide19.xml><?xml version="1.0" encoding="utf-8"?>
+<p:sld xmlns:a="http://schemas.openxmlformats.org/drawingml/2006/main" xmlns:p="http://schemas.openxmlformats.org/presentationml/2006/main" xmlns:r="http://schemas.openxmlformats.org/officeDocument/2006/relationships">
+  <p:cSld>
+    <p:spTree>
+      <p:nvGrpSpPr>
+        <p:cNvPr id="1" name=""/>
+        <p:cNvGrpSpPr/>
+        <p:nvPr/>
+      </p:nvGrpSpPr>
+      <p:grpSpPr/>
+      <p:sp>
+        <p:nvSpPr>
+          <p:cNvPr id="2" name="TextBox 1"/>
+          <p:cNvSpPr txBox="1"/>
+          <p:nvPr/>
+        </p:nvSpPr>
+        <p:spPr>
+          <a:xfrm>
+            <a:off x="91440" y="27432"/>
+            <a:ext cx="8869680" cy="393192"/>
+          </a:xfrm>
+          <a:prstGeom prst="rect">
+            <a:avLst/>
+          </a:prstGeom>
+          <a:noFill/>
+        </p:spPr>
+        <p:txBody>
+          <a:bodyPr wrap="none">
+            <a:spAutoFit/>
+          </a:bodyPr>
+          <a:lstStyle/>
+          <a:p>
+            <a:r>
+              <a:rPr sz="1800" b="1"/>
+              <a:t>권장 HP 튜닝 순서 (1~5순위)</a:t>
+            </a:r>
+          </a:p>
+        </p:txBody>
+      </p:sp>
+      <p:graphicFrame>
+        <p:nvGraphicFramePr>
+          <p:cNvPr id="3" name="Table 2"/>
+          <p:cNvGraphicFramePr>
+            <a:graphicFrameLocks noGrp="1"/>
+          </p:cNvGraphicFramePr>
+          <p:nvPr/>
+        </p:nvGraphicFramePr>
+        <p:xfrm>
+          <a:off x="91440" y="457200"/>
+          <a:ext cx="8869680" cy="4114800"/>
+        </p:xfrm>
+        <a:graphic>
+          <a:graphicData uri="http://schemas.openxmlformats.org/drawingml/2006/table">
+            <a:tbl>
+              <a:tblPr firstRow="1" bandRow="1">
+                <a:tableStyleId>{5C22544A-7EE6-4342-B048-85BDC9FD1C3A}</a:tableStyleId>
+              </a:tblPr>
+              <a:tblGrid>
+                <a:gridCol w="2217420"/>
+                <a:gridCol w="2217420"/>
+                <a:gridCol w="2217420"/>
+                <a:gridCol w="2217420"/>
+              </a:tblGrid>
+              <a:tr h="685800">
+                <a:tc>
+                  <a:txBody>
+                    <a:bodyPr/>
+                    <a:lstStyle/>
+                    <a:p>
+                      <a:r>
+                        <a:rPr b="1" sz="800">
+                          <a:solidFill>
+                            <a:srgbClr val="FFFFFF"/>
+                          </a:solidFill>
+                        </a:rPr>
+                        <a:t>우선순위</a:t>
+                      </a:r>
+                    </a:p>
+                  </a:txBody>
+                  <a:tcPr/>
+                </a:tc>
+                <a:tc>
+                  <a:txBody>
+                    <a:bodyPr/>
+                    <a:lstStyle/>
+                    <a:p>
+                      <a:r>
+                        <a:rPr b="1" sz="800">
+                          <a:solidFill>
+                            <a:srgbClr val="FFFFFF"/>
+                          </a:solidFill>
+                        </a:rPr>
+                        <a:t>튜닝 항목</a:t>
+                      </a:r>
+                    </a:p>
+                  </a:txBody>
+                  <a:tcPr/>
+                </a:tc>
+                <a:tc>
+                  <a:txBody>
+                    <a:bodyPr/>
+                    <a:lstStyle/>
+                    <a:p>
+                      <a:r>
+                        <a:rPr b="1" sz="800">
+                          <a:solidFill>
+                            <a:srgbClr val="FFFFFF"/>
+                          </a:solidFill>
+                        </a:rPr>
+                        <a:t>적용 대상</a:t>
+                      </a:r>
+                    </a:p>
+                  </a:txBody>
+                  <a:tcPr/>
+                </a:tc>
+                <a:tc>
+                  <a:txBody>
+                    <a:bodyPr/>
+                    <a:lstStyle/>
+                    <a:p>
+                      <a:r>
+                        <a:rPr b="1" sz="800">
+                          <a:solidFill>
+                            <a:srgbClr val="FFFFFF"/>
+                          </a:solidFill>
+                        </a:rPr>
+                        <a:t>근거 / 기대 효과</a:t>
+                      </a:r>
+                    </a:p>
+                  </a:txBody>
+                  <a:tcPr/>
+                </a:tc>
+              </a:tr>
+              <a:tr h="685800">
+                <a:tc>
+                  <a:txBody>
+                    <a:bodyPr/>
+                    <a:lstStyle/>
+                    <a:p>
+                      <a:r>
+                        <a:rPr sz="700"/>
+                        <a:t>1순위</a:t>
+                      </a:r>
+                    </a:p>
+                    <a:p>
+                      <a:r>
+                        <a:t>(필수)</a:t>
+                      </a:r>
+                    </a:p>
+                  </a:txBody>
+                  <a:tcPr/>
+                </a:tc>
+                <a:tc>
+                  <a:txBody>
+                    <a:bodyPr/>
+                    <a:lstStyle/>
+                    <a:p>
+                      <a:r>
+                        <a:rPr sz="700"/>
+                        <a:t>모델 아키텍처 비교</a:t>
+                      </a:r>
+                    </a:p>
+                  </a:txBody>
+                  <a:tcPr/>
+                </a:tc>
+                <a:tc>
+                  <a:txBody>
+                    <a:bodyPr/>
+                    <a:lstStyle/>
+                    <a:p>
+                      <a:r>
+                        <a:rPr sz="700"/>
+                        <a:t>FEMTO / Milling</a:t>
+                      </a:r>
+                    </a:p>
+                  </a:txBody>
+                  <a:tcPr/>
+                </a:tc>
+                <a:tc>
+                  <a:txBody>
+                    <a:bodyPr/>
+                    <a:lstStyle/>
+                    <a:p>
+                      <a:r>
+                        <a:rPr sz="700"/>
+                        <a:t>• FEMTO: LSTM/GRU/BiLSTM/1D-CNN/CNN-LSTM 5종 비교</a:t>
+                      </a:r>
+                    </a:p>
+                    <a:p>
+                      <a:r>
+                        <a:t>• Milling: 1D-CNN 단일 → Bi-LSTM/Transformer 확장 가능</a:t>
+                      </a:r>
+                    </a:p>
+                    <a:p>
+                      <a:r>
+                        <a:t>→ 아키텍처 오선택은 다른 HP 조정으로 보완 불가</a:t>
+                      </a:r>
+                    </a:p>
+                  </a:txBody>
+                  <a:tcPr/>
+                </a:tc>
+              </a:tr>
+              <a:tr h="685800">
+                <a:tc>
+                  <a:txBody>
+                    <a:bodyPr/>
+                    <a:lstStyle/>
+                    <a:p>
+                      <a:r>
+                        <a:rPr sz="700"/>
+                        <a:t>2순위</a:t>
+                      </a:r>
+                    </a:p>
+                    <a:p>
+                      <a:r>
+                        <a:t>(높음)</a:t>
+                      </a:r>
+                    </a:p>
+                  </a:txBody>
+                  <a:tcPr/>
+                </a:tc>
+                <a:tc>
+                  <a:txBody>
+                    <a:bodyPr/>
+                    <a:lstStyle/>
+                    <a:p>
+                      <a:r>
+                        <a:rPr sz="700"/>
+                        <a:t>에폭 / EarlyStopping</a:t>
+                      </a:r>
+                    </a:p>
+                    <a:p>
+                      <a:r>
+                        <a:t>patience</a:t>
+                      </a:r>
+                    </a:p>
+                  </a:txBody>
+                  <a:tcPr/>
+                </a:tc>
+                <a:tc>
+                  <a:txBody>
+                    <a:bodyPr/>
+                    <a:lstStyle/>
+                    <a:p>
+                      <a:r>
+                        <a:rPr sz="700"/>
+                        <a:t>두 소스 공통</a:t>
+                      </a:r>
+                    </a:p>
+                  </a:txBody>
+                  <a:tcPr/>
+                </a:tc>
+                <a:tc>
+                  <a:txBody>
+                    <a:bodyPr/>
+                    <a:lstStyle/>
+                    <a:p>
+                      <a:r>
+                        <a:rPr sz="700"/>
+                        <a:t>실제 수렴 에폭(8~10) 확인 후 patience 조정</a:t>
+                      </a:r>
+                    </a:p>
+                    <a:p>
+                      <a:r>
+                        <a:t>• 너무 작으면 과소학습 / 너무 크면 과적합</a:t>
+                      </a:r>
+                    </a:p>
+                    <a:p>
+                      <a:r>
+                        <a:t>→ val_loss 곡선 보며 5~10 범위 결정</a:t>
+                      </a:r>
+                    </a:p>
+                  </a:txBody>
+                  <a:tcPr/>
+                </a:tc>
+              </a:tr>
+              <a:tr h="685800">
+                <a:tc>
+                  <a:txBody>
+                    <a:bodyPr/>
+                    <a:lstStyle/>
+                    <a:p>
+                      <a:r>
+                        <a:rPr sz="700"/>
+                        <a:t>3순위</a:t>
+                      </a:r>
+                    </a:p>
+                    <a:p>
+                      <a:r>
+                        <a:t>(높음)</a:t>
+                      </a:r>
+                    </a:p>
+                  </a:txBody>
+                  <a:tcPr/>
+                </a:tc>
+                <a:tc>
+                  <a:txBody>
+                    <a:bodyPr/>
+                    <a:lstStyle/>
+                    <a:p>
+                      <a:r>
+                        <a:rPr sz="700"/>
+                        <a:t>학습률</a:t>
+                      </a:r>
+                    </a:p>
+                    <a:p>
+                      <a:r>
+                        <a:t>(Learning Rate)</a:t>
+                      </a:r>
+                    </a:p>
+                  </a:txBody>
+                  <a:tcPr/>
+                </a:tc>
+                <a:tc>
+                  <a:txBody>
+                    <a:bodyPr/>
+                    <a:lstStyle/>
+                    <a:p>
+                      <a:r>
+                        <a:rPr sz="700"/>
+                        <a:t>두 소스 공통</a:t>
+                      </a:r>
+                    </a:p>
+                  </a:txBody>
+                  <a:tcPr/>
+                </a:tc>
+                <a:tc>
+                  <a:txBody>
+                    <a:bodyPr/>
+                    <a:lstStyle/>
+                    <a:p>
+                      <a:r>
+                        <a:rPr sz="700"/>
+                        <a:t>현재 Adam lr=1e-3 고정</a:t>
+                      </a:r>
+                    </a:p>
+                    <a:p>
+                      <a:r>
+                        <a:t>ReduceLROnPlateau로 자동 감소 중 (factor=0.5, patience=4)</a:t>
+                      </a:r>
+                    </a:p>
+                    <a:p>
+                      <a:r>
+                        <a:t>→ 1e-3→1e-4 범위 그리드서치 추가 권장</a:t>
+                      </a:r>
+                    </a:p>
+                  </a:txBody>
+                  <a:tcPr/>
+                </a:tc>
+              </a:tr>
+              <a:tr h="685800">
+                <a:tc>
+                  <a:txBody>
+                    <a:bodyPr/>
+                    <a:lstStyle/>
+                    <a:p>
+                      <a:r>
+                        <a:rPr sz="700"/>
+                        <a:t>4순위</a:t>
+                      </a:r>
+                    </a:p>
+                    <a:p>
+                      <a:r>
+                        <a:t>(중간)</a:t>
+                      </a:r>
+                    </a:p>
+                  </a:txBody>
+                  <a:tcPr/>
+                </a:tc>
+                <a:tc>
+                  <a:txBody>
+                    <a:bodyPr/>
+                    <a:lstStyle/>
+                    <a:p>
+                      <a:r>
+                        <a:rPr sz="700"/>
+                        <a:t>윈도우/시퀀스 길이</a:t>
+                      </a:r>
+                    </a:p>
+                  </a:txBody>
+                  <a:tcPr/>
+                </a:tc>
+                <a:tc>
+                  <a:txBody>
+                    <a:bodyPr/>
+                    <a:lstStyle/>
+                    <a:p>
+                      <a:r>
+                        <a:rPr sz="700"/>
+                        <a:t>FEMTO</a:t>
+                      </a:r>
+                    </a:p>
+                  </a:txBody>
+                  <a:tcPr/>
+                </a:tc>
+                <a:tc>
+                  <a:txBody>
+                    <a:bodyPr/>
+                    <a:lstStyle/>
+                    <a:p>
+                      <a:r>
+                        <a:rPr sz="700"/>
+                        <a:t>그리드서치 완료 (20/30/50) → 최적 window=20</a:t>
+                      </a:r>
+                    </a:p>
+                    <a:p>
+                      <a:r>
+                        <a:t>→ 10/15/20 세부 탐색으로 추가 최적화 가능</a:t>
+                      </a:r>
+                    </a:p>
+                  </a:txBody>
+                  <a:tcPr/>
+                </a:tc>
+              </a:tr>
+              <a:tr h="685800">
+                <a:tc>
+                  <a:txBody>
+                    <a:bodyPr/>
+                    <a:lstStyle/>
+                    <a:p>
+                      <a:r>
+                        <a:rPr sz="700"/>
+                        <a:t>5순위</a:t>
+                      </a:r>
+                    </a:p>
+                    <a:p>
+                      <a:r>
+                        <a:t>(중간)</a:t>
+                      </a:r>
+                    </a:p>
+                  </a:txBody>
+                  <a:tcPr/>
+                </a:tc>
+                <a:tc>
+                  <a:txBody>
+                    <a:bodyPr/>
+                    <a:lstStyle/>
+                    <a:p>
+                      <a:r>
+                        <a:rPr sz="700"/>
+                        <a:t>유닛/필터 수</a:t>
+                      </a:r>
+                    </a:p>
+                  </a:txBody>
+                  <a:tcPr/>
+                </a:tc>
+                <a:tc>
+                  <a:txBody>
+                    <a:bodyPr/>
+                    <a:lstStyle/>
+                    <a:p>
+                      <a:r>
+                        <a:rPr sz="700"/>
+                        <a:t>두 소스 공통</a:t>
+                      </a:r>
+                    </a:p>
+                  </a:txBody>
+                  <a:tcPr/>
+                </a:tc>
+                <a:tc>
+                  <a:txBody>
+                    <a:bodyPr/>
+                    <a:lstStyle/>
+                    <a:p>
+                      <a:r>
+                        <a:rPr sz="700"/>
+                        <a:t>그리드서치 완료 (32/64/128) → 최적 units=32</a:t>
+                      </a:r>
+                    </a:p>
+                    <a:p>
+                      <a:r>
+                        <a:t>Milling 필터: 64→128→256(고정) → 32→64→128 축소 검토</a:t>
+                      </a:r>
+                    </a:p>
+                    <a:p>
+                      <a:r>
+                        <a:t>→ 파라미터 줄이면서 성능 유지 여부 확인</a:t>
+                      </a:r>
+                    </a:p>
+                  </a:txBody>
+                  <a:tcPr/>
+                </a:tc>
+              </a:tr>
+            </a:tbl>
+          </a:graphicData>
+        </a:graphic>
+      </p:graphicFrame>
+    </p:spTree>
+  </p:cSld>
+  <p:clrMapOvr>
+    <a:masterClrMapping/>
+  </p:clrMapOvr>
+</p:sld>
+</file>
+
 <file path=ppt/slides/slide2.xml><?xml version="1.0" encoding="utf-8"?>
 <p:sld xmlns:a="http://schemas.openxmlformats.org/drawingml/2006/main" xmlns:p="http://schemas.openxmlformats.org/presentationml/2006/main" xmlns:r="http://schemas.openxmlformats.org/officeDocument/2006/relationships">
   <p:cSld>
@@ -3927,6 +8213,1647 @@
 </p:sld>
 </file>
 
+<file path=ppt/slides/slide20.xml><?xml version="1.0" encoding="utf-8"?>
+<p:sld xmlns:a="http://schemas.openxmlformats.org/drawingml/2006/main" xmlns:p="http://schemas.openxmlformats.org/presentationml/2006/main" xmlns:r="http://schemas.openxmlformats.org/officeDocument/2006/relationships">
+  <p:cSld>
+    <p:spTree>
+      <p:nvGrpSpPr>
+        <p:cNvPr id="1" name=""/>
+        <p:cNvGrpSpPr/>
+        <p:nvPr/>
+      </p:nvGrpSpPr>
+      <p:grpSpPr/>
+      <p:sp>
+        <p:nvSpPr>
+          <p:cNvPr id="2" name="TextBox 1"/>
+          <p:cNvSpPr txBox="1"/>
+          <p:nvPr/>
+        </p:nvSpPr>
+        <p:spPr>
+          <a:xfrm>
+            <a:off x="91440" y="27432"/>
+            <a:ext cx="8869680" cy="393192"/>
+          </a:xfrm>
+          <a:prstGeom prst="rect">
+            <a:avLst/>
+          </a:prstGeom>
+          <a:noFill/>
+        </p:spPr>
+        <p:txBody>
+          <a:bodyPr wrap="none">
+            <a:spAutoFit/>
+          </a:bodyPr>
+          <a:lstStyle/>
+          <a:p>
+            <a:r>
+              <a:rPr sz="1800" b="1"/>
+              <a:t>권장 HP 튜닝 순서 (6순위~보완항목)</a:t>
+            </a:r>
+          </a:p>
+        </p:txBody>
+      </p:sp>
+      <p:graphicFrame>
+        <p:nvGraphicFramePr>
+          <p:cNvPr id="3" name="Table 2"/>
+          <p:cNvGraphicFramePr>
+            <a:graphicFrameLocks noGrp="1"/>
+          </p:cNvGraphicFramePr>
+          <p:nvPr/>
+        </p:nvGraphicFramePr>
+        <p:xfrm>
+          <a:off x="91440" y="457200"/>
+          <a:ext cx="8869680" cy="3200400"/>
+        </p:xfrm>
+        <a:graphic>
+          <a:graphicData uri="http://schemas.openxmlformats.org/drawingml/2006/table">
+            <a:tbl>
+              <a:tblPr firstRow="1" bandRow="1">
+                <a:tableStyleId>{5C22544A-7EE6-4342-B048-85BDC9FD1C3A}</a:tableStyleId>
+              </a:tblPr>
+              <a:tblGrid>
+                <a:gridCol w="2217420"/>
+                <a:gridCol w="2217420"/>
+                <a:gridCol w="2217420"/>
+                <a:gridCol w="2217420"/>
+              </a:tblGrid>
+              <a:tr h="640080">
+                <a:tc>
+                  <a:txBody>
+                    <a:bodyPr/>
+                    <a:lstStyle/>
+                    <a:p>
+                      <a:r>
+                        <a:rPr b="1" sz="800">
+                          <a:solidFill>
+                            <a:srgbClr val="FFFFFF"/>
+                          </a:solidFill>
+                        </a:rPr>
+                        <a:t>우선순위</a:t>
+                      </a:r>
+                    </a:p>
+                  </a:txBody>
+                  <a:tcPr/>
+                </a:tc>
+                <a:tc>
+                  <a:txBody>
+                    <a:bodyPr/>
+                    <a:lstStyle/>
+                    <a:p>
+                      <a:r>
+                        <a:rPr b="1" sz="800">
+                          <a:solidFill>
+                            <a:srgbClr val="FFFFFF"/>
+                          </a:solidFill>
+                        </a:rPr>
+                        <a:t>튜닝 항목</a:t>
+                      </a:r>
+                    </a:p>
+                  </a:txBody>
+                  <a:tcPr/>
+                </a:tc>
+                <a:tc>
+                  <a:txBody>
+                    <a:bodyPr/>
+                    <a:lstStyle/>
+                    <a:p>
+                      <a:r>
+                        <a:rPr b="1" sz="800">
+                          <a:solidFill>
+                            <a:srgbClr val="FFFFFF"/>
+                          </a:solidFill>
+                        </a:rPr>
+                        <a:t>적용 대상</a:t>
+                      </a:r>
+                    </a:p>
+                  </a:txBody>
+                  <a:tcPr/>
+                </a:tc>
+                <a:tc>
+                  <a:txBody>
+                    <a:bodyPr/>
+                    <a:lstStyle/>
+                    <a:p>
+                      <a:r>
+                        <a:rPr b="1" sz="800">
+                          <a:solidFill>
+                            <a:srgbClr val="FFFFFF"/>
+                          </a:solidFill>
+                        </a:rPr>
+                        <a:t>근거 / 기대 효과</a:t>
+                      </a:r>
+                    </a:p>
+                  </a:txBody>
+                  <a:tcPr/>
+                </a:tc>
+              </a:tr>
+              <a:tr h="640080">
+                <a:tc>
+                  <a:txBody>
+                    <a:bodyPr/>
+                    <a:lstStyle/>
+                    <a:p>
+                      <a:r>
+                        <a:rPr sz="700"/>
+                        <a:t>6순위</a:t>
+                      </a:r>
+                    </a:p>
+                    <a:p>
+                      <a:r>
+                        <a:t>(중간)</a:t>
+                      </a:r>
+                    </a:p>
+                  </a:txBody>
+                  <a:tcPr/>
+                </a:tc>
+                <a:tc>
+                  <a:txBody>
+                    <a:bodyPr/>
+                    <a:lstStyle/>
+                    <a:p>
+                      <a:r>
+                        <a:rPr sz="700"/>
+                        <a:t>드롭아웃</a:t>
+                      </a:r>
+                    </a:p>
+                    <a:p>
+                      <a:r>
+                        <a:t>(Dropout)</a:t>
+                      </a:r>
+                    </a:p>
+                  </a:txBody>
+                  <a:tcPr/>
+                </a:tc>
+                <a:tc>
+                  <a:txBody>
+                    <a:bodyPr/>
+                    <a:lstStyle/>
+                    <a:p>
+                      <a:r>
+                        <a:rPr sz="700"/>
+                        <a:t>두 소스 공통</a:t>
+                      </a:r>
+                    </a:p>
+                  </a:txBody>
+                  <a:tcPr/>
+                </a:tc>
+                <a:tc>
+                  <a:txBody>
+                    <a:bodyPr/>
+                    <a:lstStyle/>
+                    <a:p>
+                      <a:r>
+                        <a:rPr sz="700"/>
+                        <a:t>그리드서치 완료 (0.1/0.2/0.3) → 최적 0.1</a:t>
+                      </a:r>
+                    </a:p>
+                    <a:p>
+                      <a:r>
+                        <a:t>Milling dropout=0.3 고정 → 0.2/0.4 탐색 가능</a:t>
+                      </a:r>
+                    </a:p>
+                    <a:p>
+                      <a:r>
+                        <a:t>→ 과적합 정도 보며 0.1~0.4 범위 조정</a:t>
+                      </a:r>
+                    </a:p>
+                  </a:txBody>
+                  <a:tcPr/>
+                </a:tc>
+              </a:tr>
+              <a:tr h="640080">
+                <a:tc>
+                  <a:txBody>
+                    <a:bodyPr/>
+                    <a:lstStyle/>
+                    <a:p>
+                      <a:r>
+                        <a:rPr sz="700"/>
+                        <a:t>7순위</a:t>
+                      </a:r>
+                    </a:p>
+                    <a:p>
+                      <a:r>
+                        <a:t>(낮음)</a:t>
+                      </a:r>
+                    </a:p>
+                  </a:txBody>
+                  <a:tcPr/>
+                </a:tc>
+                <a:tc>
+                  <a:txBody>
+                    <a:bodyPr/>
+                    <a:lstStyle/>
+                    <a:p>
+                      <a:r>
+                        <a:rPr sz="700"/>
+                        <a:t>배치 크기</a:t>
+                      </a:r>
+                    </a:p>
+                    <a:p>
+                      <a:r>
+                        <a:t>(Batch Size)</a:t>
+                      </a:r>
+                    </a:p>
+                  </a:txBody>
+                  <a:tcPr/>
+                </a:tc>
+                <a:tc>
+                  <a:txBody>
+                    <a:bodyPr/>
+                    <a:lstStyle/>
+                    <a:p>
+                      <a:r>
+                        <a:rPr sz="700"/>
+                        <a:t>두 소스 공통</a:t>
+                      </a:r>
+                    </a:p>
+                  </a:txBody>
+                  <a:tcPr/>
+                </a:tc>
+                <a:tc>
+                  <a:txBody>
+                    <a:bodyPr/>
+                    <a:lstStyle/>
+                    <a:p>
+                      <a:r>
+                        <a:rPr sz="700"/>
+                        <a:t>추가 실험: FEMTO batch=16 → OOS RMSE 956→837 (12.5%↑)</a:t>
+                      </a:r>
+                    </a:p>
+                    <a:p>
+                      <a:r>
+                        <a:t>Milling: 임계값=0.5 조건에서 모든 배치 크기 collapse</a:t>
+                      </a:r>
+                    </a:p>
+                    <a:p>
+                      <a:r>
+                        <a:t>→ 임계값(0.75) 복원 후 배치 크기 재탐색 권장</a:t>
+                      </a:r>
+                    </a:p>
+                  </a:txBody>
+                  <a:tcPr/>
+                </a:tc>
+              </a:tr>
+              <a:tr h="640080">
+                <a:tc>
+                  <a:txBody>
+                    <a:bodyPr/>
+                    <a:lstStyle/>
+                    <a:p>
+                      <a:r>
+                        <a:rPr sz="700"/>
+                        <a:t>8순위</a:t>
+                      </a:r>
+                    </a:p>
+                    <a:p>
+                      <a:r>
+                        <a:t>(선택)</a:t>
+                      </a:r>
+                    </a:p>
+                  </a:txBody>
+                  <a:tcPr/>
+                </a:tc>
+                <a:tc>
+                  <a:txBody>
+                    <a:bodyPr/>
+                    <a:lstStyle/>
+                    <a:p>
+                      <a:r>
+                        <a:rPr sz="700"/>
+                        <a:t>필터 수 세부 조정</a:t>
+                      </a:r>
+                    </a:p>
+                  </a:txBody>
+                  <a:tcPr/>
+                </a:tc>
+                <a:tc>
+                  <a:txBody>
+                    <a:bodyPr/>
+                    <a:lstStyle/>
+                    <a:p>
+                      <a:r>
+                        <a:rPr sz="700"/>
+                        <a:t>Milling</a:t>
+                      </a:r>
+                    </a:p>
+                  </a:txBody>
+                  <a:tcPr/>
+                </a:tc>
+                <a:tc>
+                  <a:txBody>
+                    <a:bodyPr/>
+                    <a:lstStyle/>
+                    <a:p>
+                      <a:r>
+                        <a:rPr sz="700"/>
+                        <a:t>소형(32→64→128): 파라미터 53K / 현재(64→128→256): 176K</a:t>
+                      </a:r>
+                    </a:p>
+                    <a:p>
+                      <a:r>
+                        <a:t>임계값=0.5 조건에서 차이 없음 (모두 collapse)</a:t>
+                      </a:r>
+                    </a:p>
+                    <a:p>
+                      <a:r>
+                        <a:t>→ 임계값 문제 해결 후 경량화 목적으로 소형 필터 검토</a:t>
+                      </a:r>
+                    </a:p>
+                  </a:txBody>
+                  <a:tcPr/>
+                </a:tc>
+              </a:tr>
+              <a:tr h="640080">
+                <a:tc>
+                  <a:txBody>
+                    <a:bodyPr/>
+                    <a:lstStyle/>
+                    <a:p>
+                      <a:r>
+                        <a:rPr sz="700"/>
+                        <a:t>보완</a:t>
+                      </a:r>
+                    </a:p>
+                    <a:p>
+                      <a:r>
+                        <a:t>(옵션)</a:t>
+                      </a:r>
+                    </a:p>
+                  </a:txBody>
+                  <a:tcPr/>
+                </a:tc>
+                <a:tc>
+                  <a:txBody>
+                    <a:bodyPr/>
+                    <a:lstStyle/>
+                    <a:p>
+                      <a:r>
+                        <a:rPr sz="700"/>
+                        <a:t>분류 임계값</a:t>
+                      </a:r>
+                    </a:p>
+                    <a:p>
+                      <a:r>
+                        <a:t>(Threshold)</a:t>
+                      </a:r>
+                    </a:p>
+                  </a:txBody>
+                  <a:tcPr/>
+                </a:tc>
+                <a:tc>
+                  <a:txBody>
+                    <a:bodyPr/>
+                    <a:lstStyle/>
+                    <a:p>
+                      <a:r>
+                        <a:rPr sz="700"/>
+                        <a:t>Milling</a:t>
+                      </a:r>
+                    </a:p>
+                  </a:txBody>
+                  <a:tcPr/>
+                </a:tc>
+                <a:tc>
+                  <a:txBody>
+                    <a:bodyPr/>
+                    <a:lstStyle/>
+                    <a:p>
+                      <a:r>
+                        <a:rPr sz="700"/>
+                        <a:t>현재: 0.75 (기존 모델) / 실험: 0.5 (collapse 원인)</a:t>
+                      </a:r>
+                    </a:p>
+                    <a:p>
+                      <a:r>
+                        <a:t>→ 0.5~0.8 범위 탐색, Precision-Recall 곡선 기반 최적화</a:t>
+                      </a:r>
+                    </a:p>
+                  </a:txBody>
+                  <a:tcPr/>
+                </a:tc>
+              </a:tr>
+            </a:tbl>
+          </a:graphicData>
+        </a:graphic>
+      </p:graphicFrame>
+      <p:sp>
+        <p:nvSpPr>
+          <p:cNvPr id="4" name="TextBox 3"/>
+          <p:cNvSpPr txBox="1"/>
+          <p:nvPr/>
+        </p:nvSpPr>
+        <p:spPr>
+          <a:xfrm>
+            <a:off x="91440" y="3749039"/>
+            <a:ext cx="8869680" cy="548640"/>
+          </a:xfrm>
+          <a:prstGeom prst="rect">
+            <a:avLst/>
+          </a:prstGeom>
+          <a:noFill/>
+        </p:spPr>
+        <p:txBody>
+          <a:bodyPr wrap="square">
+            <a:spAutoFit/>
+          </a:bodyPr>
+          <a:lstStyle/>
+          <a:p>
+            <a:r>
+              <a:rPr sz="800"/>
+              <a:t>※ 1~3순위를 먼저 안정화한 뒤 4~8순위를 순차 적용하는 것을 권장합니다.</a:t>
+            </a:r>
+          </a:p>
+          <a:p>
+            <a:r>
+              <a:t>※ Milling에서는 임계값 복원(0.75)이 다른 HP 조정보다 우선합니다.</a:t>
+            </a:r>
+          </a:p>
+        </p:txBody>
+      </p:sp>
+    </p:spTree>
+  </p:cSld>
+  <p:clrMapOvr>
+    <a:masterClrMapping/>
+  </p:clrMapOvr>
+</p:sld>
+</file>
+
+<file path=ppt/slides/slide21.xml><?xml version="1.0" encoding="utf-8"?>
+<p:sld xmlns:a="http://schemas.openxmlformats.org/drawingml/2006/main" xmlns:p="http://schemas.openxmlformats.org/presentationml/2006/main" xmlns:r="http://schemas.openxmlformats.org/officeDocument/2006/relationships">
+  <p:cSld>
+    <p:spTree>
+      <p:nvGrpSpPr>
+        <p:cNvPr id="1" name=""/>
+        <p:cNvGrpSpPr/>
+        <p:nvPr/>
+      </p:nvGrpSpPr>
+      <p:grpSpPr/>
+      <p:sp>
+        <p:nvSpPr>
+          <p:cNvPr id="2" name="TextBox 1"/>
+          <p:cNvSpPr txBox="1"/>
+          <p:nvPr/>
+        </p:nvSpPr>
+        <p:spPr>
+          <a:xfrm>
+            <a:off x="91440" y="27432"/>
+            <a:ext cx="8869680" cy="393192"/>
+          </a:xfrm>
+          <a:prstGeom prst="rect">
+            <a:avLst/>
+          </a:prstGeom>
+          <a:noFill/>
+        </p:spPr>
+        <p:txBody>
+          <a:bodyPr wrap="none">
+            <a:spAutoFit/>
+          </a:bodyPr>
+          <a:lstStyle/>
+          <a:p>
+            <a:r>
+              <a:rPr sz="1800" b="1"/>
+              <a:t>Streamlit 앱 기능 목록 (ML / DL / LLM)</a:t>
+            </a:r>
+          </a:p>
+        </p:txBody>
+      </p:sp>
+      <p:graphicFrame>
+        <p:nvGraphicFramePr>
+          <p:cNvPr id="3" name="Table 2"/>
+          <p:cNvGraphicFramePr>
+            <a:graphicFrameLocks noGrp="1"/>
+          </p:cNvGraphicFramePr>
+          <p:nvPr/>
+        </p:nvGraphicFramePr>
+        <p:xfrm>
+          <a:off x="91440" y="457200"/>
+          <a:ext cx="8869680" cy="4572000"/>
+        </p:xfrm>
+        <a:graphic>
+          <a:graphicData uri="http://schemas.openxmlformats.org/drawingml/2006/table">
+            <a:tbl>
+              <a:tblPr firstRow="1" bandRow="1">
+                <a:tableStyleId>{5C22544A-7EE6-4342-B048-85BDC9FD1C3A}</a:tableStyleId>
+              </a:tblPr>
+              <a:tblGrid>
+                <a:gridCol w="1267097"/>
+                <a:gridCol w="1267097"/>
+                <a:gridCol w="1267097"/>
+                <a:gridCol w="1267097"/>
+                <a:gridCol w="1267097"/>
+                <a:gridCol w="1267097"/>
+                <a:gridCol w="1267098"/>
+              </a:tblGrid>
+              <a:tr h="457200">
+                <a:tc>
+                  <a:txBody>
+                    <a:bodyPr/>
+                    <a:lstStyle/>
+                    <a:p>
+                      <a:r>
+                        <a:rPr b="1" sz="800">
+                          <a:solidFill>
+                            <a:srgbClr val="FFFFFF"/>
+                          </a:solidFill>
+                        </a:rPr>
+                        <a:t>앱 파일</a:t>
+                      </a:r>
+                    </a:p>
+                  </a:txBody>
+                  <a:tcPr/>
+                </a:tc>
+                <a:tc>
+                  <a:txBody>
+                    <a:bodyPr/>
+                    <a:lstStyle/>
+                    <a:p>
+                      <a:r>
+                        <a:rPr b="1" sz="800">
+                          <a:solidFill>
+                            <a:srgbClr val="FFFFFF"/>
+                          </a:solidFill>
+                        </a:rPr>
+                        <a:t>탭/메뉴</a:t>
+                      </a:r>
+                    </a:p>
+                  </a:txBody>
+                  <a:tcPr/>
+                </a:tc>
+                <a:tc>
+                  <a:txBody>
+                    <a:bodyPr/>
+                    <a:lstStyle/>
+                    <a:p>
+                      <a:r>
+                        <a:rPr b="1" sz="800">
+                          <a:solidFill>
+                            <a:srgbClr val="FFFFFF"/>
+                          </a:solidFill>
+                        </a:rPr>
+                        <a:t>기능 설명</a:t>
+                      </a:r>
+                    </a:p>
+                  </a:txBody>
+                  <a:tcPr/>
+                </a:tc>
+                <a:tc>
+                  <a:txBody>
+                    <a:bodyPr/>
+                    <a:lstStyle/>
+                    <a:p>
+                      <a:r>
+                        <a:rPr b="1" sz="800">
+                          <a:solidFill>
+                            <a:srgbClr val="FFFFFF"/>
+                          </a:solidFill>
+                        </a:rPr>
+                        <a:t>카테고리</a:t>
+                      </a:r>
+                    </a:p>
+                  </a:txBody>
+                  <a:tcPr/>
+                </a:tc>
+                <a:tc>
+                  <a:txBody>
+                    <a:bodyPr/>
+                    <a:lstStyle/>
+                    <a:p>
+                      <a:r>
+                        <a:rPr b="1" sz="800">
+                          <a:solidFill>
+                            <a:srgbClr val="FFFFFF"/>
+                          </a:solidFill>
+                        </a:rPr>
+                        <a:t>회귀/분류</a:t>
+                      </a:r>
+                    </a:p>
+                  </a:txBody>
+                  <a:tcPr/>
+                </a:tc>
+                <a:tc>
+                  <a:txBody>
+                    <a:bodyPr/>
+                    <a:lstStyle/>
+                    <a:p>
+                      <a:r>
+                        <a:rPr b="1" sz="800">
+                          <a:solidFill>
+                            <a:srgbClr val="FFFFFF"/>
+                          </a:solidFill>
+                        </a:rPr>
+                        <a:t>사용 모델</a:t>
+                      </a:r>
+                    </a:p>
+                  </a:txBody>
+                  <a:tcPr/>
+                </a:tc>
+                <a:tc>
+                  <a:txBody>
+                    <a:bodyPr/>
+                    <a:lstStyle/>
+                    <a:p>
+                      <a:r>
+                        <a:rPr b="1" sz="800">
+                          <a:solidFill>
+                            <a:srgbClr val="FFFFFF"/>
+                          </a:solidFill>
+                        </a:rPr>
+                        <a:t>사용 데이터</a:t>
+                      </a:r>
+                    </a:p>
+                  </a:txBody>
+                  <a:tcPr/>
+                </a:tc>
+              </a:tr>
+              <a:tr h="457200">
+                <a:tc>
+                  <a:txBody>
+                    <a:bodyPr/>
+                    <a:lstStyle/>
+                    <a:p>
+                      <a:r>
+                        <a:rPr sz="700"/>
+                        <a:t>streamlit_unified.py</a:t>
+                      </a:r>
+                    </a:p>
+                  </a:txBody>
+                  <a:tcPr/>
+                </a:tc>
+                <a:tc>
+                  <a:txBody>
+                    <a:bodyPr/>
+                    <a:lstStyle/>
+                    <a:p>
+                      <a:r>
+                        <a:rPr sz="700"/>
+                        <a:t>Tab 1</a:t>
+                      </a:r>
+                    </a:p>
+                    <a:p>
+                      <a:r>
+                        <a:t>ML 진단</a:t>
+                      </a:r>
+                    </a:p>
+                  </a:txBody>
+                  <a:tcPr/>
+                </a:tc>
+                <a:tc>
+                  <a:txBody>
+                    <a:bodyPr/>
+                    <a:lstStyle/>
+                    <a:p>
+                      <a:r>
+                        <a:rPr sz="700"/>
+                        <a:t>설비 파라미터 입력</a:t>
+                      </a:r>
+                    </a:p>
+                    <a:p>
+                      <a:r>
+                        <a:t>→ 고장 확률 예측</a:t>
+                      </a:r>
+                    </a:p>
+                  </a:txBody>
+                  <a:tcPr/>
+                </a:tc>
+                <a:tc>
+                  <a:txBody>
+                    <a:bodyPr/>
+                    <a:lstStyle/>
+                    <a:p>
+                      <a:r>
+                        <a:rPr sz="700"/>
+                        <a:t>ML</a:t>
+                      </a:r>
+                    </a:p>
+                  </a:txBody>
+                  <a:tcPr/>
+                </a:tc>
+                <a:tc>
+                  <a:txBody>
+                    <a:bodyPr/>
+                    <a:lstStyle/>
+                    <a:p>
+                      <a:r>
+                        <a:rPr sz="700"/>
+                        <a:t>분류(이진)</a:t>
+                      </a:r>
+                    </a:p>
+                  </a:txBody>
+                  <a:tcPr/>
+                </a:tc>
+                <a:tc>
+                  <a:txBody>
+                    <a:bodyPr/>
+                    <a:lstStyle/>
+                    <a:p>
+                      <a:r>
+                        <a:rPr sz="700"/>
+                        <a:t>XGBoost</a:t>
+                      </a:r>
+                    </a:p>
+                  </a:txBody>
+                  <a:tcPr/>
+                </a:tc>
+                <a:tc>
+                  <a:txBody>
+                    <a:bodyPr/>
+                    <a:lstStyle/>
+                    <a:p>
+                      <a:r>
+                        <a:rPr sz="700"/>
+                        <a:t>AI4I 정형(10K행</a:t>
+                      </a:r>
+                    </a:p>
+                    <a:p>
+                      <a:r>
+                        <a:t>설비유형/rpm/토크/</a:t>
+                      </a:r>
+                    </a:p>
+                    <a:p>
+                      <a:r>
+                        <a:t>공구마모/온도)</a:t>
+                      </a:r>
+                    </a:p>
+                  </a:txBody>
+                  <a:tcPr/>
+                </a:tc>
+              </a:tr>
+              <a:tr h="457200">
+                <a:tc>
+                  <a:txBody>
+                    <a:bodyPr/>
+                    <a:lstStyle/>
+                    <a:p>
+                      <a:r>
+                        <a:rPr sz="700"/>
+                        <a:t>streamlit_unified.py</a:t>
+                      </a:r>
+                    </a:p>
+                  </a:txBody>
+                  <a:tcPr/>
+                </a:tc>
+                <a:tc>
+                  <a:txBody>
+                    <a:bodyPr/>
+                    <a:lstStyle/>
+                    <a:p>
+                      <a:r>
+                        <a:rPr sz="700"/>
+                        <a:t>Tab 2</a:t>
+                      </a:r>
+                    </a:p>
+                    <a:p>
+                      <a:r>
+                        <a:t>DL 시계열</a:t>
+                      </a:r>
+                    </a:p>
+                  </a:txBody>
+                  <a:tcPr/>
+                </a:tc>
+                <a:tc>
+                  <a:txBody>
+                    <a:bodyPr/>
+                    <a:lstStyle/>
+                    <a:p>
+                      <a:r>
+                        <a:rPr sz="700"/>
+                        <a:t>50스텝 열화 시계열</a:t>
+                      </a:r>
+                    </a:p>
+                    <a:p>
+                      <a:r>
+                        <a:t>→ 고장 탐지</a:t>
+                      </a:r>
+                    </a:p>
+                  </a:txBody>
+                  <a:tcPr/>
+                </a:tc>
+                <a:tc>
+                  <a:txBody>
+                    <a:bodyPr/>
+                    <a:lstStyle/>
+                    <a:p>
+                      <a:r>
+                        <a:rPr sz="700"/>
+                        <a:t>DL</a:t>
+                      </a:r>
+                    </a:p>
+                  </a:txBody>
+                  <a:tcPr/>
+                </a:tc>
+                <a:tc>
+                  <a:txBody>
+                    <a:bodyPr/>
+                    <a:lstStyle/>
+                    <a:p>
+                      <a:r>
+                        <a:rPr sz="700"/>
+                        <a:t>분류(이진)</a:t>
+                      </a:r>
+                    </a:p>
+                  </a:txBody>
+                  <a:tcPr/>
+                </a:tc>
+                <a:tc>
+                  <a:txBody>
+                    <a:bodyPr/>
+                    <a:lstStyle/>
+                    <a:p>
+                      <a:r>
+                        <a:rPr sz="700"/>
+                        <a:t>CNN + LSTM</a:t>
+                      </a:r>
+                    </a:p>
+                  </a:txBody>
+                  <a:tcPr/>
+                </a:tc>
+                <a:tc>
+                  <a:txBody>
+                    <a:bodyPr/>
+                    <a:lstStyle/>
+                    <a:p>
+                      <a:r>
+                        <a:rPr sz="700"/>
+                        <a:t>합성 시계열</a:t>
+                      </a:r>
+                    </a:p>
+                    <a:p>
+                      <a:r>
+                        <a:t>(50 타임스텝)</a:t>
+                      </a:r>
+                    </a:p>
+                  </a:txBody>
+                  <a:tcPr/>
+                </a:tc>
+              </a:tr>
+              <a:tr h="457200">
+                <a:tc>
+                  <a:txBody>
+                    <a:bodyPr/>
+                    <a:lstStyle/>
+                    <a:p>
+                      <a:r>
+                        <a:rPr sz="700"/>
+                        <a:t>streamlit_unified.py</a:t>
+                      </a:r>
+                    </a:p>
+                  </a:txBody>
+                  <a:tcPr/>
+                </a:tc>
+                <a:tc>
+                  <a:txBody>
+                    <a:bodyPr/>
+                    <a:lstStyle/>
+                    <a:p>
+                      <a:r>
+                        <a:rPr sz="700"/>
+                        <a:t>Tab 3</a:t>
+                      </a:r>
+                    </a:p>
+                    <a:p>
+                      <a:r>
+                        <a:t>DL 원시신호</a:t>
+                      </a:r>
+                    </a:p>
+                  </a:txBody>
+                  <a:tcPr/>
+                </a:tc>
+                <a:tc>
+                  <a:txBody>
+                    <a:bodyPr/>
+                    <a:lstStyle/>
+                    <a:p>
+                      <a:r>
+                        <a:rPr sz="700"/>
+                        <a:t>공구 원시신호</a:t>
+                      </a:r>
+                    </a:p>
+                    <a:p>
+                      <a:r>
+                        <a:t>→ 마모 판정</a:t>
+                      </a:r>
+                    </a:p>
+                  </a:txBody>
+                  <a:tcPr/>
+                </a:tc>
+                <a:tc>
+                  <a:txBody>
+                    <a:bodyPr/>
+                    <a:lstStyle/>
+                    <a:p>
+                      <a:r>
+                        <a:rPr sz="700"/>
+                        <a:t>DL</a:t>
+                      </a:r>
+                    </a:p>
+                  </a:txBody>
+                  <a:tcPr/>
+                </a:tc>
+                <a:tc>
+                  <a:txBody>
+                    <a:bodyPr/>
+                    <a:lstStyle/>
+                    <a:p>
+                      <a:r>
+                        <a:rPr sz="700"/>
+                        <a:t>분류(이진)</a:t>
+                      </a:r>
+                    </a:p>
+                  </a:txBody>
+                  <a:tcPr/>
+                </a:tc>
+                <a:tc>
+                  <a:txBody>
+                    <a:bodyPr/>
+                    <a:lstStyle/>
+                    <a:p>
+                      <a:r>
+                        <a:rPr sz="700"/>
+                        <a:t>1D-CNN(멀티채널)</a:t>
+                      </a:r>
+                    </a:p>
+                  </a:txBody>
+                  <a:tcPr/>
+                </a:tc>
+                <a:tc>
+                  <a:txBody>
+                    <a:bodyPr/>
+                    <a:lstStyle/>
+                    <a:p>
+                      <a:r>
+                        <a:rPr sz="700"/>
+                        <a:t>NASA Milling</a:t>
+                      </a:r>
+                    </a:p>
+                    <a:p>
+                      <a:r>
+                        <a:t>(512×6 원시신호)</a:t>
+                      </a:r>
+                    </a:p>
+                  </a:txBody>
+                  <a:tcPr/>
+                </a:tc>
+              </a:tr>
+              <a:tr h="457200">
+                <a:tc>
+                  <a:txBody>
+                    <a:bodyPr/>
+                    <a:lstStyle/>
+                    <a:p>
+                      <a:r>
+                        <a:rPr sz="700"/>
+                        <a:t>streamlit_unified.py</a:t>
+                      </a:r>
+                    </a:p>
+                  </a:txBody>
+                  <a:tcPr/>
+                </a:tc>
+                <a:tc>
+                  <a:txBody>
+                    <a:bodyPr/>
+                    <a:lstStyle/>
+                    <a:p>
+                      <a:r>
+                        <a:rPr sz="700"/>
+                        <a:t>Tab 4</a:t>
+                      </a:r>
+                    </a:p>
+                    <a:p>
+                      <a:r>
+                        <a:t>통합 비교</a:t>
+                      </a:r>
+                    </a:p>
+                  </a:txBody>
+                  <a:tcPr/>
+                </a:tc>
+                <a:tc>
+                  <a:txBody>
+                    <a:bodyPr/>
+                    <a:lstStyle/>
+                    <a:p>
+                      <a:r>
+                        <a:rPr sz="700"/>
+                        <a:t>ML vs DL</a:t>
+                      </a:r>
+                    </a:p>
+                    <a:p>
+                      <a:r>
+                        <a:t>성능 비교 대시보드</a:t>
+                      </a:r>
+                    </a:p>
+                  </a:txBody>
+                  <a:tcPr/>
+                </a:tc>
+                <a:tc>
+                  <a:txBody>
+                    <a:bodyPr/>
+                    <a:lstStyle/>
+                    <a:p>
+                      <a:r>
+                        <a:rPr sz="700"/>
+                        <a:t>ML+DL</a:t>
+                      </a:r>
+                    </a:p>
+                  </a:txBody>
+                  <a:tcPr/>
+                </a:tc>
+                <a:tc>
+                  <a:txBody>
+                    <a:bodyPr/>
+                    <a:lstStyle/>
+                    <a:p>
+                      <a:r>
+                        <a:rPr sz="700"/>
+                        <a:t>비교 대시보드</a:t>
+                      </a:r>
+                    </a:p>
+                  </a:txBody>
+                  <a:tcPr/>
+                </a:tc>
+                <a:tc>
+                  <a:txBody>
+                    <a:bodyPr/>
+                    <a:lstStyle/>
+                    <a:p>
+                      <a:r>
+                        <a:rPr sz="700"/>
+                        <a:t>XGBoost /</a:t>
+                      </a:r>
+                    </a:p>
+                    <a:p>
+                      <a:r>
+                        <a:t>CNN+LSTM / 1D-CNN</a:t>
+                      </a:r>
+                    </a:p>
+                  </a:txBody>
+                  <a:tcPr/>
+                </a:tc>
+                <a:tc>
+                  <a:txBody>
+                    <a:bodyPr/>
+                    <a:lstStyle/>
+                    <a:p>
+                      <a:r>
+                        <a:rPr sz="700"/>
+                        <a:t>3개 소스 통합</a:t>
+                      </a:r>
+                    </a:p>
+                  </a:txBody>
+                  <a:tcPr/>
+                </a:tc>
+              </a:tr>
+              <a:tr h="457200">
+                <a:tc>
+                  <a:txBody>
+                    <a:bodyPr/>
+                    <a:lstStyle/>
+                    <a:p>
+                      <a:r>
+                        <a:rPr sz="700"/>
+                        <a:t>streamlit_app.py</a:t>
+                      </a:r>
+                    </a:p>
+                  </a:txBody>
+                  <a:tcPr/>
+                </a:tc>
+                <a:tc>
+                  <a:txBody>
+                    <a:bodyPr/>
+                    <a:lstStyle/>
+                    <a:p>
+                      <a:r>
+                        <a:rPr sz="700"/>
+                        <a:t>단건 시뮬레이션</a:t>
+                      </a:r>
+                    </a:p>
+                  </a:txBody>
+                  <a:tcPr/>
+                </a:tc>
+                <a:tc>
+                  <a:txBody>
+                    <a:bodyPr/>
+                    <a:lstStyle/>
+                    <a:p>
+                      <a:r>
+                        <a:rPr sz="700"/>
+                        <a:t>파라미터 입력</a:t>
+                      </a:r>
+                    </a:p>
+                    <a:p>
+                      <a:r>
+                        <a:t>→ 시퀀스 생성 → 예측</a:t>
+                      </a:r>
+                    </a:p>
+                  </a:txBody>
+                  <a:tcPr/>
+                </a:tc>
+                <a:tc>
+                  <a:txBody>
+                    <a:bodyPr/>
+                    <a:lstStyle/>
+                    <a:p>
+                      <a:r>
+                        <a:rPr sz="700"/>
+                        <a:t>DL</a:t>
+                      </a:r>
+                    </a:p>
+                  </a:txBody>
+                  <a:tcPr/>
+                </a:tc>
+                <a:tc>
+                  <a:txBody>
+                    <a:bodyPr/>
+                    <a:lstStyle/>
+                    <a:p>
+                      <a:r>
+                        <a:rPr sz="700"/>
+                        <a:t>분류(이진)</a:t>
+                      </a:r>
+                    </a:p>
+                  </a:txBody>
+                  <a:tcPr/>
+                </a:tc>
+                <a:tc>
+                  <a:txBody>
+                    <a:bodyPr/>
+                    <a:lstStyle/>
+                    <a:p>
+                      <a:r>
+                        <a:rPr sz="700"/>
+                        <a:t>CNN + LSTM</a:t>
+                      </a:r>
+                    </a:p>
+                  </a:txBody>
+                  <a:tcPr/>
+                </a:tc>
+                <a:tc>
+                  <a:txBody>
+                    <a:bodyPr/>
+                    <a:lstStyle/>
+                    <a:p>
+                      <a:r>
+                        <a:rPr sz="700"/>
+                        <a:t>합성 시뮬레이션</a:t>
+                      </a:r>
+                    </a:p>
+                  </a:txBody>
+                  <a:tcPr/>
+                </a:tc>
+              </a:tr>
+              <a:tr h="457200">
+                <a:tc>
+                  <a:txBody>
+                    <a:bodyPr/>
+                    <a:lstStyle/>
+                    <a:p>
+                      <a:r>
+                        <a:rPr sz="700"/>
+                        <a:t>streamlit_app.py</a:t>
+                      </a:r>
+                    </a:p>
+                  </a:txBody>
+                  <a:tcPr/>
+                </a:tc>
+                <a:tc>
+                  <a:txBody>
+                    <a:bodyPr/>
+                    <a:lstStyle/>
+                    <a:p>
+                      <a:r>
+                        <a:rPr sz="700"/>
+                        <a:t>데모 CSV</a:t>
+                      </a:r>
+                    </a:p>
+                    <a:p>
+                      <a:r>
+                        <a:t>일괄 예측</a:t>
+                      </a:r>
+                    </a:p>
+                  </a:txBody>
+                  <a:tcPr/>
+                </a:tc>
+                <a:tc>
+                  <a:txBody>
+                    <a:bodyPr/>
+                    <a:lstStyle/>
+                    <a:p>
+                      <a:r>
+                        <a:rPr sz="700"/>
+                        <a:t>demo CSV 업로드</a:t>
+                      </a:r>
+                    </a:p>
+                    <a:p>
+                      <a:r>
+                        <a:t>→ 배치 예측 및 시각화</a:t>
+                      </a:r>
+                    </a:p>
+                  </a:txBody>
+                  <a:tcPr/>
+                </a:tc>
+                <a:tc>
+                  <a:txBody>
+                    <a:bodyPr/>
+                    <a:lstStyle/>
+                    <a:p>
+                      <a:r>
+                        <a:rPr sz="700"/>
+                        <a:t>DL</a:t>
+                      </a:r>
+                    </a:p>
+                  </a:txBody>
+                  <a:tcPr/>
+                </a:tc>
+                <a:tc>
+                  <a:txBody>
+                    <a:bodyPr/>
+                    <a:lstStyle/>
+                    <a:p>
+                      <a:r>
+                        <a:rPr sz="700"/>
+                        <a:t>분류(이진)</a:t>
+                      </a:r>
+                    </a:p>
+                  </a:txBody>
+                  <a:tcPr/>
+                </a:tc>
+                <a:tc>
+                  <a:txBody>
+                    <a:bodyPr/>
+                    <a:lstStyle/>
+                    <a:p>
+                      <a:r>
+                        <a:rPr sz="700"/>
+                        <a:t>CNN + LSTM</a:t>
+                      </a:r>
+                    </a:p>
+                  </a:txBody>
+                  <a:tcPr/>
+                </a:tc>
+                <a:tc>
+                  <a:txBody>
+                    <a:bodyPr/>
+                    <a:lstStyle/>
+                    <a:p>
+                      <a:r>
+                        <a:rPr sz="700"/>
+                        <a:t>합성 시계열</a:t>
+                      </a:r>
+                    </a:p>
+                    <a:p>
+                      <a:r>
+                        <a:t>(demo CSV)</a:t>
+                      </a:r>
+                    </a:p>
+                  </a:txBody>
+                  <a:tcPr/>
+                </a:tc>
+              </a:tr>
+              <a:tr h="457200">
+                <a:tc>
+                  <a:txBody>
+                    <a:bodyPr/>
+                    <a:lstStyle/>
+                    <a:p>
+                      <a:r>
+                        <a:rPr sz="700"/>
+                        <a:t>streamlit_femto.py</a:t>
+                      </a:r>
+                    </a:p>
+                  </a:txBody>
+                  <a:tcPr/>
+                </a:tc>
+                <a:tc>
+                  <a:txBody>
+                    <a:bodyPr/>
+                    <a:lstStyle/>
+                    <a:p>
+                      <a:r>
+                        <a:rPr sz="700"/>
+                        <a:t>ML 열화 분류</a:t>
+                      </a:r>
+                    </a:p>
+                  </a:txBody>
+                  <a:tcPr/>
+                </a:tc>
+                <a:tc>
+                  <a:txBody>
+                    <a:bodyPr/>
+                    <a:lstStyle/>
+                    <a:p>
+                      <a:r>
+                        <a:rPr sz="700"/>
+                        <a:t>베어링 센서값</a:t>
+                      </a:r>
+                    </a:p>
+                    <a:p>
+                      <a:r>
+                        <a:t>→ 열화 단계 판정</a:t>
+                      </a:r>
+                    </a:p>
+                  </a:txBody>
+                  <a:tcPr/>
+                </a:tc>
+                <a:tc>
+                  <a:txBody>
+                    <a:bodyPr/>
+                    <a:lstStyle/>
+                    <a:p>
+                      <a:r>
+                        <a:rPr sz="700"/>
+                        <a:t>ML</a:t>
+                      </a:r>
+                    </a:p>
+                  </a:txBody>
+                  <a:tcPr/>
+                </a:tc>
+                <a:tc>
+                  <a:txBody>
+                    <a:bodyPr/>
+                    <a:lstStyle/>
+                    <a:p>
+                      <a:r>
+                        <a:rPr sz="700"/>
+                        <a:t>분류(다중)</a:t>
+                      </a:r>
+                    </a:p>
+                  </a:txBody>
+                  <a:tcPr/>
+                </a:tc>
+                <a:tc>
+                  <a:txBody>
+                    <a:bodyPr/>
+                    <a:lstStyle/>
+                    <a:p>
+                      <a:r>
+                        <a:rPr sz="700"/>
+                        <a:t>Random Forest /</a:t>
+                      </a:r>
+                    </a:p>
+                    <a:p>
+                      <a:r>
+                        <a:t>Gradient Boosting</a:t>
+                      </a:r>
+                    </a:p>
+                  </a:txBody>
+                  <a:tcPr/>
+                </a:tc>
+                <a:tc>
+                  <a:txBody>
+                    <a:bodyPr/>
+                    <a:lstStyle/>
+                    <a:p>
+                      <a:r>
+                        <a:rPr sz="700"/>
+                        <a:t>FEMTO-ST 베어링</a:t>
+                      </a:r>
+                    </a:p>
+                    <a:p>
+                      <a:r>
+                        <a:t>(진동+온도 피처)</a:t>
+                      </a:r>
+                    </a:p>
+                  </a:txBody>
+                  <a:tcPr/>
+                </a:tc>
+              </a:tr>
+              <a:tr h="457200">
+                <a:tc>
+                  <a:txBody>
+                    <a:bodyPr/>
+                    <a:lstStyle/>
+                    <a:p>
+                      <a:r>
+                        <a:rPr sz="700"/>
+                        <a:t>streamlit_femto.py</a:t>
+                      </a:r>
+                    </a:p>
+                  </a:txBody>
+                  <a:tcPr/>
+                </a:tc>
+                <a:tc>
+                  <a:txBody>
+                    <a:bodyPr/>
+                    <a:lstStyle/>
+                    <a:p>
+                      <a:r>
+                        <a:rPr sz="700"/>
+                        <a:t>DL RUL 예측</a:t>
+                      </a:r>
+                    </a:p>
+                  </a:txBody>
+                  <a:tcPr/>
+                </a:tc>
+                <a:tc>
+                  <a:txBody>
+                    <a:bodyPr/>
+                    <a:lstStyle/>
+                    <a:p>
+                      <a:r>
+                        <a:rPr sz="700"/>
+                        <a:t>슬라이딩 윈도우</a:t>
+                      </a:r>
+                    </a:p>
+                    <a:p>
+                      <a:r>
+                        <a:t>→ 잔여수명(RUL) 예측</a:t>
+                      </a:r>
+                    </a:p>
+                  </a:txBody>
+                  <a:tcPr/>
+                </a:tc>
+                <a:tc>
+                  <a:txBody>
+                    <a:bodyPr/>
+                    <a:lstStyle/>
+                    <a:p>
+                      <a:r>
+                        <a:rPr sz="700"/>
+                        <a:t>DL</a:t>
+                      </a:r>
+                    </a:p>
+                  </a:txBody>
+                  <a:tcPr/>
+                </a:tc>
+                <a:tc>
+                  <a:txBody>
+                    <a:bodyPr/>
+                    <a:lstStyle/>
+                    <a:p>
+                      <a:r>
+                        <a:rPr sz="700"/>
+                        <a:t>회귀</a:t>
+                      </a:r>
+                    </a:p>
+                  </a:txBody>
+                  <a:tcPr/>
+                </a:tc>
+                <a:tc>
+                  <a:txBody>
+                    <a:bodyPr/>
+                    <a:lstStyle/>
+                    <a:p>
+                      <a:r>
+                        <a:rPr sz="700"/>
+                        <a:t>GRU / LSTM</a:t>
+                      </a:r>
+                    </a:p>
+                    <a:p>
+                      <a:r>
+                        <a:t>(window=20, units=32)</a:t>
+                      </a:r>
+                    </a:p>
+                  </a:txBody>
+                  <a:tcPr/>
+                </a:tc>
+                <a:tc>
+                  <a:txBody>
+                    <a:bodyPr/>
+                    <a:lstStyle/>
+                    <a:p>
+                      <a:r>
+                        <a:rPr sz="700"/>
+                        <a:t>FEMTO-ST 베어링</a:t>
+                      </a:r>
+                    </a:p>
+                    <a:p>
+                      <a:r>
+                        <a:t>(FEMTO_processed)</a:t>
+                      </a:r>
+                    </a:p>
+                  </a:txBody>
+                  <a:tcPr/>
+                </a:tc>
+              </a:tr>
+              <a:tr h="457200">
+                <a:tc>
+                  <a:txBody>
+                    <a:bodyPr/>
+                    <a:lstStyle/>
+                    <a:p>
+                      <a:r>
+                        <a:rPr sz="700"/>
+                        <a:t>streamlit_rag.py</a:t>
+                      </a:r>
+                    </a:p>
+                  </a:txBody>
+                  <a:tcPr/>
+                </a:tc>
+                <a:tc>
+                  <a:txBody>
+                    <a:bodyPr/>
+                    <a:lstStyle/>
+                    <a:p>
+                      <a:r>
+                        <a:rPr sz="700"/>
+                        <a:t>RAG</a:t>
+                      </a:r>
+                    </a:p>
+                    <a:p>
+                      <a:r>
+                        <a:t>유사 사례 검색</a:t>
+                      </a:r>
+                    </a:p>
+                  </a:txBody>
+                  <a:tcPr/>
+                </a:tc>
+                <a:tc>
+                  <a:txBody>
+                    <a:bodyPr/>
+                    <a:lstStyle/>
+                    <a:p>
+                      <a:r>
+                        <a:rPr sz="700"/>
+                        <a:t>센서 측정값 → FAISS</a:t>
+                      </a:r>
+                    </a:p>
+                    <a:p>
+                      <a:r>
+                        <a:t>코사인 유사도 검색</a:t>
+                      </a:r>
+                    </a:p>
+                    <a:p>
+                      <a:r>
+                        <a:t>→ Top-K 사례 + RUL 추정</a:t>
+                      </a:r>
+                    </a:p>
+                  </a:txBody>
+                  <a:tcPr/>
+                </a:tc>
+                <a:tc>
+                  <a:txBody>
+                    <a:bodyPr/>
+                    <a:lstStyle/>
+                    <a:p>
+                      <a:r>
+                        <a:rPr sz="700"/>
+                        <a:t>LLM(RAG)</a:t>
+                      </a:r>
+                    </a:p>
+                  </a:txBody>
+                  <a:tcPr/>
+                </a:tc>
+                <a:tc>
+                  <a:txBody>
+                    <a:bodyPr/>
+                    <a:lstStyle/>
+                    <a:p>
+                      <a:r>
+                        <a:rPr sz="700"/>
+                        <a:t>검색 + 회귀</a:t>
+                      </a:r>
+                    </a:p>
+                  </a:txBody>
+                  <a:tcPr/>
+                </a:tc>
+                <a:tc>
+                  <a:txBody>
+                    <a:bodyPr/>
+                    <a:lstStyle/>
+                    <a:p>
+                      <a:r>
+                        <a:rPr sz="700"/>
+                        <a:t>FAISS 벡터 검색</a:t>
+                      </a:r>
+                    </a:p>
+                    <a:p>
+                      <a:r>
+                        <a:t>(12차원 피처)</a:t>
+                      </a:r>
+                    </a:p>
+                  </a:txBody>
+                  <a:tcPr/>
+                </a:tc>
+                <a:tc>
+                  <a:txBody>
+                    <a:bodyPr/>
+                    <a:lstStyle/>
+                    <a:p>
+                      <a:r>
+                        <a:rPr sz="700"/>
+                        <a:t>FEMTO-ST 이력</a:t>
+                      </a:r>
+                    </a:p>
+                    <a:p>
+                      <a:r>
+                        <a:t>(베어링 전체 수명)</a:t>
+                      </a:r>
+                    </a:p>
+                  </a:txBody>
+                  <a:tcPr/>
+                </a:tc>
+              </a:tr>
+            </a:tbl>
+          </a:graphicData>
+        </a:graphic>
+      </p:graphicFrame>
+    </p:spTree>
+  </p:cSld>
+  <p:clrMapOvr>
+    <a:masterClrMapping/>
+  </p:clrMapOvr>
+</p:sld>
+</file>
+
 <file path=ppt/slides/slide3.xml><?xml version="1.0" encoding="utf-8"?>
 <p:sld xmlns:a="http://schemas.openxmlformats.org/drawingml/2006/main" xmlns:p="http://schemas.openxmlformats.org/presentationml/2006/main" xmlns:r="http://schemas.openxmlformats.org/officeDocument/2006/relationships">
   <p:cSld>
@@ -8402,6 +14329,235 @@
           </a:p>
         </p:txBody>
       </p:sp>
+    </p:spTree>
+  </p:cSld>
+  <p:clrMapOvr>
+    <a:masterClrMapping/>
+  </p:clrMapOvr>
+</p:sld>
+</file>
+
+<file path=ppt/slides/slide9.xml><?xml version="1.0" encoding="utf-8"?>
+<p:sld xmlns:a="http://schemas.openxmlformats.org/drawingml/2006/main" xmlns:p="http://schemas.openxmlformats.org/presentationml/2006/main" xmlns:r="http://schemas.openxmlformats.org/officeDocument/2006/relationships">
+  <p:cSld>
+    <p:spTree>
+      <p:nvGrpSpPr>
+        <p:cNvPr id="1" name=""/>
+        <p:cNvGrpSpPr/>
+        <p:nvPr/>
+      </p:nvGrpSpPr>
+      <p:grpSpPr/>
+      <p:sp>
+        <p:nvSpPr>
+          <p:cNvPr id="2" name="TextBox 1"/>
+          <p:cNvSpPr txBox="1"/>
+          <p:nvPr/>
+        </p:nvSpPr>
+        <p:spPr>
+          <a:xfrm>
+            <a:off x="274320" y="91440"/>
+            <a:ext cx="8412480" cy="548640"/>
+          </a:xfrm>
+          <a:prstGeom prst="rect">
+            <a:avLst/>
+          </a:prstGeom>
+          <a:noFill/>
+        </p:spPr>
+        <p:txBody>
+          <a:bodyPr wrap="none">
+            <a:spAutoFit/>
+          </a:bodyPr>
+          <a:lstStyle/>
+          <a:p>
+            <a:r>
+              <a:rPr sz="2400" b="1"/>
+              <a:t>전처리 — 시계열 Shuffle 처리</a:t>
+            </a:r>
+          </a:p>
+        </p:txBody>
+      </p:sp>
+      <p:graphicFrame>
+        <p:nvGraphicFramePr>
+          <p:cNvPr id="3" name="Table 2"/>
+          <p:cNvGraphicFramePr>
+            <a:graphicFrameLocks noGrp="1"/>
+          </p:cNvGraphicFramePr>
+          <p:nvPr/>
+        </p:nvGraphicFramePr>
+        <p:xfrm>
+          <a:off x="274320" y="731520"/>
+          <a:ext cx="8412480" cy="1828800"/>
+        </p:xfrm>
+        <a:graphic>
+          <a:graphicData uri="http://schemas.openxmlformats.org/drawingml/2006/table">
+            <a:tbl>
+              <a:tblPr firstRow="1" bandRow="1">
+                <a:tableStyleId>{5C22544A-7EE6-4342-B048-85BDC9FD1C3A}</a:tableStyleId>
+              </a:tblPr>
+              <a:tblGrid>
+                <a:gridCol w="2804160"/>
+                <a:gridCol w="2804160"/>
+                <a:gridCol w="2804160"/>
+              </a:tblGrid>
+              <a:tr h="457200">
+                <a:tc>
+                  <a:txBody>
+                    <a:bodyPr/>
+                    <a:lstStyle/>
+                    <a:p>
+                      <a:r>
+                        <a:rPr b="1"/>
+                        <a:t>소스</a:t>
+                      </a:r>
+                    </a:p>
+                  </a:txBody>
+                  <a:tcPr/>
+                </a:tc>
+                <a:tc>
+                  <a:txBody>
+                    <a:bodyPr/>
+                    <a:lstStyle/>
+                    <a:p>
+                      <a:r>
+                        <a:rPr b="1"/>
+                        <a:t>방식</a:t>
+                      </a:r>
+                    </a:p>
+                  </a:txBody>
+                  <a:tcPr/>
+                </a:tc>
+                <a:tc>
+                  <a:txBody>
+                    <a:bodyPr/>
+                    <a:lstStyle/>
+                    <a:p>
+                      <a:r>
+                        <a:rPr b="1"/>
+                        <a:t>평가</a:t>
+                      </a:r>
+                    </a:p>
+                  </a:txBody>
+                  <a:tcPr/>
+                </a:tc>
+              </a:tr>
+              <a:tr h="457200">
+                <a:tc>
+                  <a:txBody>
+                    <a:bodyPr/>
+                    <a:lstStyle/>
+                    <a:p>
+                      <a:r>
+                        <a:t>Source 2 (합성)</a:t>
+                      </a:r>
+                    </a:p>
+                  </a:txBody>
+                  <a:tcPr/>
+                </a:tc>
+                <a:tc>
+                  <a:txBody>
+                    <a:bodyPr/>
+                    <a:lstStyle/>
+                    <a:p>
+                      <a:r>
+                        <a:t>StratifiedKFold(shuffle=True)</a:t>
+                      </a:r>
+                    </a:p>
+                  </a:txBody>
+                  <a:tcPr/>
+                </a:tc>
+                <a:tc>
+                  <a:txBody>
+                    <a:bodyPr/>
+                    <a:lstStyle/>
+                    <a:p>
+                      <a:r>
+                        <a:t>OK: 독립 run</a:t>
+                      </a:r>
+                    </a:p>
+                  </a:txBody>
+                  <a:tcPr/>
+                </a:tc>
+              </a:tr>
+              <a:tr h="457200">
+                <a:tc>
+                  <a:txBody>
+                    <a:bodyPr/>
+                    <a:lstStyle/>
+                    <a:p>
+                      <a:r>
+                        <a:t>Source 3 (Milling)</a:t>
+                      </a:r>
+                    </a:p>
+                  </a:txBody>
+                  <a:tcPr/>
+                </a:tc>
+                <a:tc>
+                  <a:txBody>
+                    <a:bodyPr/>
+                    <a:lstStyle/>
+                    <a:p>
+                      <a:r>
+                        <a:t>train_test_split(shuffle=True)</a:t>
+                      </a:r>
+                    </a:p>
+                  </a:txBody>
+                  <a:tcPr/>
+                </a:tc>
+                <a:tc>
+                  <a:txBody>
+                    <a:bodyPr/>
+                    <a:lstStyle/>
+                    <a:p>
+                      <a:r>
+                        <a:t>수정: shuffle=False 적용</a:t>
+                      </a:r>
+                    </a:p>
+                  </a:txBody>
+                  <a:tcPr/>
+                </a:tc>
+              </a:tr>
+              <a:tr h="457200">
+                <a:tc>
+                  <a:txBody>
+                    <a:bodyPr/>
+                    <a:lstStyle/>
+                    <a:p>
+                      <a:r>
+                        <a:t>FEMTO</a:t>
+                      </a:r>
+                    </a:p>
+                  </a:txBody>
+                  <a:tcPr/>
+                </a:tc>
+                <a:tc>
+                  <a:txBody>
+                    <a:bodyPr/>
+                    <a:lstStyle/>
+                    <a:p>
+                      <a:r>
+                        <a:t>GroupKFold(bearing 단위)</a:t>
+                      </a:r>
+                    </a:p>
+                  </a:txBody>
+                  <a:tcPr/>
+                </a:tc>
+                <a:tc>
+                  <a:txBody>
+                    <a:bodyPr/>
+                    <a:lstStyle/>
+                    <a:p>
+                      <a:r>
+                        <a:t>OK: 시계열 누수 방지</a:t>
+                      </a:r>
+                    </a:p>
+                  </a:txBody>
+                  <a:tcPr/>
+                </a:tc>
+              </a:tr>
+            </a:tbl>
+          </a:graphicData>
+        </a:graphic>
+      </p:graphicFrame>
     </p:spTree>
   </p:cSld>
   <p:clrMapOvr>

--- a/Homework/DL_FactoryAutomation/산출물/발표용_FEMTO_RUL_20260624.pptx
+++ b/Homework/DL_FactoryAutomation/산출물/발표용_FEMTO_RUL_20260624.pptx
@@ -26,6 +26,8 @@
     <p:sldId id="274" r:id="rId25"/>
     <p:sldId id="275" r:id="rId26"/>
     <p:sldId id="276" r:id="rId27"/>
+    <p:sldId id="277" r:id="rId28"/>
+    <p:sldId id="278" r:id="rId29"/>
   </p:sldIdLst>
   <p:sldSz cx="12188952" cy="6858000" type="screen4x3"/>
   <p:notesSz cx="6858000" cy="9144000"/>
@@ -9846,6 +9848,286 @@
           </a:graphicData>
         </a:graphic>
       </p:graphicFrame>
+    </p:spTree>
+  </p:cSld>
+  <p:clrMapOvr>
+    <a:masterClrMapping/>
+  </p:clrMapOvr>
+</p:sld>
+</file>
+
+<file path=ppt/slides/slide22.xml><?xml version="1.0" encoding="utf-8"?>
+<p:sld xmlns:a="http://schemas.openxmlformats.org/drawingml/2006/main" xmlns:p="http://schemas.openxmlformats.org/presentationml/2006/main" xmlns:r="http://schemas.openxmlformats.org/officeDocument/2006/relationships">
+  <p:cSld>
+    <p:spTree>
+      <p:nvGrpSpPr>
+        <p:cNvPr id="1" name=""/>
+        <p:cNvGrpSpPr/>
+        <p:nvPr/>
+      </p:nvGrpSpPr>
+      <p:grpSpPr/>
+      <p:sp>
+        <p:nvSpPr>
+          <p:cNvPr id="2" name="Vertical Title 1"/>
+          <p:cNvSpPr>
+            <a:spLocks noGrp="1"/>
+          </p:cNvSpPr>
+          <p:nvPr>
+            <p:ph type="title" orient="vert"/>
+          </p:nvPr>
+        </p:nvSpPr>
+        <p:spPr/>
+        <p:txBody>
+          <a:bodyPr/>
+          <a:lstStyle/>
+          <a:p/>
+        </p:txBody>
+      </p:sp>
+      <p:sp>
+        <p:nvSpPr>
+          <p:cNvPr id="3" name="Vertical Text Placeholder 2"/>
+          <p:cNvSpPr>
+            <a:spLocks noGrp="1"/>
+          </p:cNvSpPr>
+          <p:nvPr>
+            <p:ph type="body" idx="1" orient="vert"/>
+          </p:nvPr>
+        </p:nvSpPr>
+        <p:spPr/>
+        <p:txBody>
+          <a:bodyPr/>
+          <a:lstStyle/>
+          <a:p/>
+        </p:txBody>
+      </p:sp>
+      <p:sp>
+        <p:nvSpPr>
+          <p:cNvPr id="4" name="TextBox 3"/>
+          <p:cNvSpPr txBox="1"/>
+          <p:nvPr/>
+        </p:nvSpPr>
+        <p:spPr>
+          <a:xfrm>
+            <a:off x="91440" y="45720"/>
+            <a:ext cx="8869680" cy="365760"/>
+          </a:xfrm>
+          <a:prstGeom prst="rect">
+            <a:avLst/>
+          </a:prstGeom>
+          <a:noFill/>
+        </p:spPr>
+        <p:txBody>
+          <a:bodyPr wrap="none">
+            <a:spAutoFit/>
+          </a:bodyPr>
+          <a:lstStyle/>
+          <a:p>
+            <a:r>
+              <a:rPr sz="1600" b="1"/>
+              <a:t>OOS RMSE 각주</a:t>
+            </a:r>
+          </a:p>
+        </p:txBody>
+      </p:sp>
+      <p:sp>
+        <p:nvSpPr>
+          <p:cNvPr id="5" name="TextBox 4"/>
+          <p:cNvSpPr txBox="1"/>
+          <p:nvPr/>
+        </p:nvSpPr>
+        <p:spPr>
+          <a:xfrm>
+            <a:off x="91440" y="457200"/>
+            <a:ext cx="8869680" cy="4114800"/>
+          </a:xfrm>
+          <a:prstGeom prst="rect">
+            <a:avLst/>
+          </a:prstGeom>
+          <a:noFill/>
+        </p:spPr>
+        <p:txBody>
+          <a:bodyPr wrap="square">
+            <a:spAutoFit/>
+          </a:bodyPr>
+          <a:lstStyle/>
+          <a:p>
+            <a:r>
+              <a:rPr sz="900"/>
+              <a:t>【OOS RMSE 각주】</a:t>
+            </a:r>
+          </a:p>
+          <a:p>
+            <a:r>
+              <a:t>• OOS(Out-Of-Sample): 학습에 미사용된 테스트셋으로 측정한 RMSE → 모델 일반화 성능 지표</a:t>
+            </a:r>
+          </a:p>
+          <a:p>
+            <a:r>
+              <a:t>  ↔ In-Sample RMSE(학습셋)와 대비; 실무 모델 선정 기준은 OOS 우선</a:t>
+            </a:r>
+          </a:p>
+          <a:p>
+            <a:r>
+              <a:t>• 단위: 분(min). 836.6분 ≈ 'RUL 예측이 실제와 평균 ~836분 차이' (제곱평균 → 큰 오차 가중)</a:t>
+            </a:r>
+          </a:p>
+          <a:p>
+            <a:r>
+              <a:t>• 작을수록 우수. OOS ≫ In-Sample 이면 과적합 신호</a:t>
+            </a:r>
+          </a:p>
+          <a:p>
+            <a:r>
+              <a:t>• 기준선 956분: 그리드서치 챔피언(window=20, units=32, dropout=0.1)의 고정 참조값</a:t>
+            </a:r>
+          </a:p>
+          <a:p>
+            <a:r>
+              <a:t>  ≠ batch=32 재실험값(1002.6분). 동일 설정도 시드·초기화 변동으로 실행마다 결과 상이</a:t>
+            </a:r>
+          </a:p>
+          <a:p>
+            <a:r>
+              <a:t>  → 표의 '기존(batch=32)'과 '기준(956분)'은 별개 개념; 혼동 방지 주석</a:t>
+            </a:r>
+          </a:p>
+        </p:txBody>
+      </p:sp>
+    </p:spTree>
+  </p:cSld>
+  <p:clrMapOvr>
+    <a:masterClrMapping/>
+  </p:clrMapOvr>
+</p:sld>
+</file>
+
+<file path=ppt/slides/slide23.xml><?xml version="1.0" encoding="utf-8"?>
+<p:sld xmlns:a="http://schemas.openxmlformats.org/drawingml/2006/main" xmlns:p="http://schemas.openxmlformats.org/presentationml/2006/main" xmlns:r="http://schemas.openxmlformats.org/officeDocument/2006/relationships">
+  <p:cSld>
+    <p:spTree>
+      <p:nvGrpSpPr>
+        <p:cNvPr id="1" name=""/>
+        <p:cNvGrpSpPr/>
+        <p:nvPr/>
+      </p:nvGrpSpPr>
+      <p:grpSpPr/>
+      <p:sp>
+        <p:nvSpPr>
+          <p:cNvPr id="2" name="Vertical Title 1"/>
+          <p:cNvSpPr>
+            <a:spLocks noGrp="1"/>
+          </p:cNvSpPr>
+          <p:nvPr>
+            <p:ph type="title" orient="vert"/>
+          </p:nvPr>
+        </p:nvSpPr>
+        <p:spPr/>
+        <p:txBody>
+          <a:bodyPr/>
+          <a:lstStyle/>
+          <a:p/>
+        </p:txBody>
+      </p:sp>
+      <p:sp>
+        <p:nvSpPr>
+          <p:cNvPr id="3" name="Vertical Text Placeholder 2"/>
+          <p:cNvSpPr>
+            <a:spLocks noGrp="1"/>
+          </p:cNvSpPr>
+          <p:nvPr>
+            <p:ph type="body" idx="1" orient="vert"/>
+          </p:nvPr>
+        </p:nvSpPr>
+        <p:spPr/>
+        <p:txBody>
+          <a:bodyPr/>
+          <a:lstStyle/>
+          <a:p/>
+        </p:txBody>
+      </p:sp>
+      <p:sp>
+        <p:nvSpPr>
+          <p:cNvPr id="4" name="TextBox 3"/>
+          <p:cNvSpPr txBox="1"/>
+          <p:nvPr/>
+        </p:nvSpPr>
+        <p:spPr>
+          <a:xfrm>
+            <a:off x="91440" y="45720"/>
+            <a:ext cx="8869680" cy="320040"/>
+          </a:xfrm>
+          <a:prstGeom prst="rect">
+            <a:avLst/>
+          </a:prstGeom>
+          <a:noFill/>
+        </p:spPr>
+        <p:txBody>
+          <a:bodyPr wrap="none">
+            <a:spAutoFit/>
+          </a:bodyPr>
+          <a:lstStyle/>
+          <a:p>
+            <a:r>
+              <a:rPr sz="1600" b="1"/>
+              <a:t>Milling 분류 모델 비교</a:t>
+            </a:r>
+          </a:p>
+        </p:txBody>
+      </p:sp>
+      <p:sp>
+        <p:nvSpPr>
+          <p:cNvPr id="5" name="TextBox 4"/>
+          <p:cNvSpPr txBox="1"/>
+          <p:nvPr/>
+        </p:nvSpPr>
+        <p:spPr>
+          <a:xfrm>
+            <a:off x="91440" y="411480"/>
+            <a:ext cx="8869680" cy="3931920"/>
+          </a:xfrm>
+          <a:prstGeom prst="rect">
+            <a:avLst/>
+          </a:prstGeom>
+          <a:noFill/>
+        </p:spPr>
+        <p:txBody>
+          <a:bodyPr wrap="square">
+            <a:spAutoFit/>
+          </a:bodyPr>
+          <a:lstStyle/>
+          <a:p>
+            <a:r>
+              <a:rPr sz="900"/>
+              <a:t>임계값 0.75 — 3모델 전체 F1=0.0 (붕괴)</a:t>
+            </a:r>
+          </a:p>
+          <a:p>
+            <a:r>
+              <a:rPr sz="900"/>
+              <a:t>원인: 9에폭 조기종료 + P(마모)≈0.66 &lt; 0.75 → 전부 0 예측</a:t>
+            </a:r>
+          </a:p>
+          <a:p/>
+          <a:p>
+            <a:r>
+              <a:rPr sz="900"/>
+              <a:t>1D-CNN(멀티채널): ACC=0.3424 F1=0.0000 AUC=0.5000 params=176,321</a:t>
+            </a:r>
+          </a:p>
+          <a:p>
+            <a:r>
+              <a:rPr sz="900"/>
+              <a:t>MLP(Flatten→Dense): ACC=0.3424 F1=0.0000 AUC=0.5000 params=1,722,753</a:t>
+            </a:r>
+          </a:p>
+          <a:p>
+            <a:r>
+              <a:rPr sz="900"/>
+              <a:t>BiLSTM(Conv다운샘플→Bi-LSTM): ACC=0.3424 F1=0.0000 AUC=0.5000 params=59,617</a:t>
+            </a:r>
+          </a:p>
+        </p:txBody>
+      </p:sp>
     </p:spTree>
   </p:cSld>
   <p:clrMapOvr>

--- a/Homework/DL_FactoryAutomation/산출물/발표용_FEMTO_RUL_20260624.pptx
+++ b/Homework/DL_FactoryAutomation/산출물/발표용_FEMTO_RUL_20260624.pptx
@@ -4592,7 +4592,7 @@
                     <a:p>
                       <a:r>
                         <a:rPr sz="900"/>
-                        <a:t>Adam (lr=1e-3)</a:t>
+                        <a:t>Adam (lr=1e-4)</a:t>
                       </a:r>
                     </a:p>
                   </a:txBody>
@@ -4605,7 +4605,7 @@
                     <a:p>
                       <a:r>
                         <a:rPr sz="900"/>
-                        <a:t>Adam (lr=1e-3)</a:t>
+                        <a:t>Adam (lr=1e-4)</a:t>
                       </a:r>
                     </a:p>
                   </a:txBody>
@@ -4687,7 +4687,7 @@
                     <a:p>
                       <a:r>
                         <a:rPr sz="900"/>
-                        <a:t>50 (EarlyStopping patience=8</a:t>
+                        <a:t>50 (EarlyStopping patience=20</a:t>
                       </a:r>
                     </a:p>
                     <a:p>
@@ -6369,7 +6369,7 @@
                     </a:p>
                     <a:p>
                       <a:r>
-                        <a:t>(patience=8)</a:t>
+                        <a:t>(patience=20)</a:t>
                       </a:r>
                     </a:p>
                   </a:txBody>
@@ -6501,7 +6501,7 @@
                     <a:p>
                       <a:r>
                         <a:rPr sz="900"/>
-                        <a:t>patience=8</a:t>
+                        <a:t>patience=20</a:t>
                       </a:r>
                     </a:p>
                     <a:p>
@@ -7452,7 +7452,7 @@
                     <a:p>
                       <a:r>
                         <a:rPr sz="700"/>
-                        <a:t>현재 Adam lr=1e-3 고정</a:t>
+                        <a:t>현재 Adam lr=1e-4 고정</a:t>
                       </a:r>
                     </a:p>
                     <a:p>

--- a/Homework/DL_FactoryAutomation/산출물/발표용_FEMTO_RUL_20260624.pptx
+++ b/Homework/DL_FactoryAutomation/산출물/발표용_FEMTO_RUL_20260624.pptx
@@ -5671,7 +5671,7 @@
           </a:p>
           <a:p>
             <a:r>
-              <a:t>최적 배치 = 16 → OOS RMSE = 836.6분 (-119.4분 개선, 12.5% 향상)</a:t>
+              <a:t>최적 배치 = 16 → OOS RMSE = 810.4분 (-119.4분 개선, 12.5% 향상)</a:t>
             </a:r>
           </a:p>
         </p:txBody>
@@ -5733,7 +5733,7 @@
           </a:p>
           <a:p>
             <a:r>
-              <a:t>  956.05 → 836.6분으로 개선 (향후 그리드 포함 권장)</a:t>
+              <a:t>  956.05 → 810.4분으로 개선 (향후 그리드 포함 권장)</a:t>
             </a:r>
           </a:p>
         </p:txBody>
@@ -9968,7 +9968,7 @@
           </a:p>
           <a:p>
             <a:r>
-              <a:t>• 단위: 분(min). 836.6분 ≈ 'RUL 예측이 실제와 평균 ~836분 차이' (제곱평균 → 큰 오차 가중)</a:t>
+              <a:t>• 단위: 분(min). 810.4분 ≈ 'RUL 예측이 실제와 평균 ~836분 차이' (제곱평균 → 큰 오차 가중)</a:t>
             </a:r>
           </a:p>
           <a:p>

--- a/Homework/DL_FactoryAutomation/산출물/발표용_FEMTO_RUL_20260624.pptx
+++ b/Homework/DL_FactoryAutomation/산출물/발표용_FEMTO_RUL_20260624.pptx
@@ -5136,7 +5136,7 @@
           </a:p>
           <a:p>
             <a:r>
-              <a:t>※ 두 소스 모두 EarlyStopping 적용으로 최대 에폭(50)에 도달 전 조기 종료됩니다</a:t>
+              <a:t>※ 두 소스 모두 EarlyStopping 적용으로 최대 에폭(50)에 도달 전 조기 종료됩니다  +  ModelCheckpoint(save_best_only=True)</a:t>
             </a:r>
           </a:p>
         </p:txBody>
@@ -6198,7 +6198,7 @@
           </a:p>
           <a:p>
             <a:r>
-              <a:t>→ 배치 크기 단독 변경으로는 개선 불가; 임계값 조정(0.75) + EarlyStopping 완화 필요</a:t>
+              <a:t>→ 배치 크기 단독 변경으로는 개선 불가; 임계값 조정(0.75) + EarlyStopping 완화 필요  +  ModelCheckpoint(save_best_only=True)</a:t>
             </a:r>
           </a:p>
         </p:txBody>
@@ -7101,7 +7101,7 @@
           </a:p>
           <a:p>
             <a:r>
-              <a:t>→ 필터 수 단독 변경으로는 개선 불가; 임계값 0.75 + EarlyStopping 완화 필요</a:t>
+              <a:t>→ 필터 수 단독 변경으로는 개선 불가; 임계값 0.75 + EarlyStopping 완화 필요  +  ModelCheckpoint(save_best_only=True)</a:t>
             </a:r>
           </a:p>
           <a:p>

--- a/Homework/DL_FactoryAutomation/산출물/발표용_FEMTO_RUL_20260624.pptx
+++ b/Homework/DL_FactoryAutomation/산출물/발표용_FEMTO_RUL_20260624.pptx
@@ -7808,7 +7808,7 @@
                   <a:srgbClr val="00469A"/>
                 </a:solidFill>
               </a:rPr>
-              <a:t>이은주 ML 한계 → 해결책</a:t>
+              <a:t>기존 ML 방식 한계 → 해결책</a:t>
             </a:r>
           </a:p>
         </p:txBody>
@@ -11623,7 +11623,7 @@
                   <a:srgbClr val="1A1A2E"/>
                 </a:solidFill>
               </a:rPr>
-              <a:t>• 이은주 ML 참고값 (AI4I): RF Recall=1.000, F1=0.996 (데이터셋 특성 차이)</a:t>
+              <a:t>• 별도 비교 문서 참조 (AI4I): RF Recall=1.000, F1=0.996 (데이터셋 특성 차이)</a:t>
             </a:r>
           </a:p>
         </p:txBody>
